--- a/modern-excel-demo-day.pptx
+++ b/modern-excel-demo-day.pptx
@@ -17,10 +17,10 @@
     <p:sldId id="438" r:id="rId8"/>
     <p:sldId id="439" r:id="rId9"/>
     <p:sldId id="427" r:id="rId10"/>
-    <p:sldId id="257" r:id="rId11"/>
-    <p:sldId id="455" r:id="rId12"/>
-    <p:sldId id="441" r:id="rId13"/>
-    <p:sldId id="454" r:id="rId14"/>
+    <p:sldId id="441" r:id="rId11"/>
+    <p:sldId id="457" r:id="rId12"/>
+    <p:sldId id="257" r:id="rId13"/>
+    <p:sldId id="455" r:id="rId14"/>
     <p:sldId id="456" r:id="rId15"/>
     <p:sldId id="452" r:id="rId16"/>
     <p:sldId id="453" r:id="rId17"/>
@@ -3512,7 +3512,7 @@
           <a:p>
             <a:fld id="{17A98A70-FA8C-4354-959C-C70678AC9BCF}" type="datetimeFigureOut">
               <a:rPr lang="en-US" smtClean="0"/>
-              <a:t>1/19/2026</a:t>
+              <a:t>1/29/2026</a:t>
             </a:fld>
             <a:endParaRPr lang="en-US"/>
           </a:p>
@@ -4218,8 +4218,23 @@
           <a:p>
             <a:r>
               <a:rPr lang="en-US" dirty="0"/>
-              <a:t>I work with individuals, teams, and organizations at different levels, but the philosophy is always the same: reduce chaos, increase clarity, and build workflows that actually hold up over time. For individuals, this usually means self-paced courses or live workshops focused not just on learning features, but on developing judgment — understanding when to use formulas, Power Query, Python, or Copilot, and when not to. The emphasis is on clarity, maintainability, and confidence, so people feel more capable rather than more dependent on tools or experts. With teams, the work becomes more applied and workflow-driven, focusing on practical corporate training that helps reduce errors, rework, and fragile one-off fixes by applying modern Excel patterns to real business processes. At the organizational level, this often takes the form of a guided, multi-week modernization program where teams learn to build pipelines, automation, and documentation around Excel-based systems, with the goal of creating reliable, auditable workflows and true internal ownership rather than reliance on individual hero analysts.</a:t>
-            </a:r>
+              <a:t>A book with 500 recipes isn’t actually that helpful. At that point you’re just hoarding information. It gives you options, but no direction. AI is already excellent at producing that kind of broad, undifferentiated content.</a:t>
+            </a:r>
+          </a:p>
+          <a:p>
+            <a:r>
+              <a:rPr lang="en-US" dirty="0"/>
+              <a:t>What’s missing is a curated, expert perspective. Someone who has the experience to say: cook this, in this order, this way, and ignore the rest. That’s the difference between being exposed to patterns and actually getting something done.</a:t>
+            </a:r>
+          </a:p>
+          <a:p>
+            <a:r>
+              <a:rPr lang="en-US" dirty="0"/>
+              <a:t>That’s why free content is good for orientation and exploration, but paid content is where execution happens. You’re not paying for more recipes, you’re paying for judgment, sequencing, and a clear point of view that helps you solve a specific problem without drowning in choices.</a:t>
+            </a:r>
+          </a:p>
+          <a:p>
+            <a:endParaRPr lang="en-US" dirty="0"/>
           </a:p>
         </p:txBody>
       </p:sp>
@@ -4238,9 +4253,9 @@
           <a:bodyPr/>
           <a:lstStyle/>
           <a:p>
-            <a:fld id="{1053C468-B4D7-40C4-885B-735937C382A2}" type="slidenum">
+            <a:fld id="{FFB500C5-13F7-48FC-8160-C29AECF6C602}" type="slidenum">
               <a:rPr lang="en-US" smtClean="0"/>
-              <a:t>10</a:t>
+              <a:t>11</a:t>
             </a:fld>
             <a:endParaRPr lang="en-US"/>
           </a:p>
@@ -4249,7 +4264,7 @@
     </p:spTree>
     <p:extLst>
       <p:ext uri="{BB962C8B-B14F-4D97-AF65-F5344CB8AC3E}">
-        <p14:creationId xmlns:p14="http://schemas.microsoft.com/office/powerpoint/2010/main" val="4122893634"/>
+        <p14:creationId xmlns:p14="http://schemas.microsoft.com/office/powerpoint/2010/main" val="1824193319"/>
       </p:ext>
     </p:extLst>
   </p:cSld>
@@ -4305,11 +4320,34 @@
           <a:p>
             <a:r>
               <a:rPr lang="en-US" dirty="0"/>
-              <a:t>There is a PDF guide of this in </a:t>
-            </a:r>
-            <a:r>
-              <a:rPr lang="en-US"/>
-              <a:t>the downloads</a:t>
+              <a:t>I work with individuals, teams, and organizations at different levels, but the philosophy is always the same: reduce chaos, increase clarity, and build workflows that actually hold up over time. </a:t>
+            </a:r>
+          </a:p>
+          <a:p>
+            <a:endParaRPr lang="en-US" dirty="0"/>
+          </a:p>
+          <a:p>
+            <a:r>
+              <a:rPr lang="en-US" dirty="0"/>
+              <a:t>For individuals, this usually means self-paced courses or live workshops focused not just on learning features, but on developing judgment — understanding when to use formulas, Power Query, Python, or Copilot, and when not to. The emphasis is on clarity, maintainability, and confidence, so people feel more capable rather than more dependent on tools or experts. </a:t>
+            </a:r>
+          </a:p>
+          <a:p>
+            <a:endParaRPr lang="en-US" dirty="0"/>
+          </a:p>
+          <a:p>
+            <a:r>
+              <a:rPr lang="en-US" dirty="0"/>
+              <a:t>With teams, the work becomes more applied and workflow-driven, focusing on practical corporate training that helps reduce errors, rework, and fragile one-off fixes by applying modern Excel patterns to real business processes. </a:t>
+            </a:r>
+          </a:p>
+          <a:p>
+            <a:endParaRPr lang="en-US" dirty="0"/>
+          </a:p>
+          <a:p>
+            <a:r>
+              <a:rPr lang="en-US" dirty="0"/>
+              <a:t>At the organizational level, this often takes the form of a guided, multi-week modernization program where teams learn to build pipelines, automation, and documentation around Excel-based systems, with the goal of creating reliable, auditable workflows and true internal ownership rather than reliance on individual hero analysts.</a:t>
             </a:r>
           </a:p>
         </p:txBody>
@@ -4329,9 +4367,186 @@
           <a:bodyPr/>
           <a:lstStyle/>
           <a:p>
+            <a:fld id="{1053C468-B4D7-40C4-885B-735937C382A2}" type="slidenum">
+              <a:rPr lang="en-US" smtClean="0"/>
+              <a:t>12</a:t>
+            </a:fld>
+            <a:endParaRPr lang="en-US"/>
+          </a:p>
+        </p:txBody>
+      </p:sp>
+    </p:spTree>
+    <p:extLst>
+      <p:ext uri="{BB962C8B-B14F-4D97-AF65-F5344CB8AC3E}">
+        <p14:creationId xmlns:p14="http://schemas.microsoft.com/office/powerpoint/2010/main" val="4122893634"/>
+      </p:ext>
+    </p:extLst>
+  </p:cSld>
+  <p:clrMapOvr>
+    <a:masterClrMapping/>
+  </p:clrMapOvr>
+</p:notes>
+</file>
+
+<file path=ppt/notesSlides/notesSlide7.xml><?xml version="1.0" encoding="utf-8"?>
+<p:notes xmlns:a="http://schemas.openxmlformats.org/drawingml/2006/main" xmlns:r="http://schemas.openxmlformats.org/officeDocument/2006/relationships" xmlns:p="http://schemas.openxmlformats.org/presentationml/2006/main">
+  <p:cSld>
+    <p:spTree>
+      <p:nvGrpSpPr>
+        <p:cNvPr id="1" name=""/>
+        <p:cNvGrpSpPr/>
+        <p:nvPr/>
+      </p:nvGrpSpPr>
+      <p:grpSpPr>
+        <a:xfrm>
+          <a:off x="0" y="0"/>
+          <a:ext cx="0" cy="0"/>
+          <a:chOff x="0" y="0"/>
+          <a:chExt cx="0" cy="0"/>
+        </a:xfrm>
+      </p:grpSpPr>
+      <p:sp>
+        <p:nvSpPr>
+          <p:cNvPr id="2" name="Slide Image Placeholder 1"/>
+          <p:cNvSpPr>
+            <a:spLocks noGrp="1" noRot="1" noChangeAspect="1"/>
+          </p:cNvSpPr>
+          <p:nvPr>
+            <p:ph type="sldImg"/>
+          </p:nvPr>
+        </p:nvSpPr>
+        <p:spPr/>
+      </p:sp>
+      <p:sp>
+        <p:nvSpPr>
+          <p:cNvPr id="3" name="Notes Placeholder 2"/>
+          <p:cNvSpPr>
+            <a:spLocks noGrp="1"/>
+          </p:cNvSpPr>
+          <p:nvPr>
+            <p:ph type="body" idx="1"/>
+          </p:nvPr>
+        </p:nvSpPr>
+        <p:spPr/>
+        <p:txBody>
+          <a:bodyPr/>
+          <a:lstStyle/>
+          <a:p>
+            <a:r>
+              <a:rPr lang="en-US" dirty="0"/>
+              <a:t>There’s a PDF guide to this in the downloads</a:t>
+            </a:r>
+          </a:p>
+          <a:p>
+            <a:endParaRPr lang="en-US" dirty="0"/>
+          </a:p>
+          <a:p>
+            <a:r>
+              <a:rPr lang="en-US" dirty="0"/>
+              <a:t>If you’re feeling unsure where to start, this is really about matching the learning path to what you actually need right now, not what sounds most impressive. Different goals call for different levels of structure and support.</a:t>
+            </a:r>
+          </a:p>
+          <a:p>
+            <a:r>
+              <a:rPr lang="en-US" dirty="0"/>
+              <a:t>If you’re new to Excel plus AI, the right starting point is </a:t>
+            </a:r>
+            <a:r>
+              <a:rPr lang="en-US" b="1" dirty="0"/>
+              <a:t>Excel Must-Knows for AI Success</a:t>
+            </a:r>
+            <a:r>
+              <a:rPr lang="en-US" dirty="0"/>
+              <a:t>. That’s about building the foundational Excel habits and concepts that make AI tools actually useful, instead of confusing or misleading.</a:t>
+            </a:r>
+          </a:p>
+          <a:p>
+            <a:r>
+              <a:rPr lang="en-US" dirty="0"/>
+              <a:t>If your goal is specifically Python in Excel, then </a:t>
+            </a:r>
+            <a:r>
+              <a:rPr lang="en-US" b="1" dirty="0"/>
+              <a:t>Python in Excel: Quick Wins</a:t>
+            </a:r>
+            <a:r>
+              <a:rPr lang="en-US" dirty="0"/>
+              <a:t> is designed to get you productive fast. It focuses on practical examples so you can see value quickly without needing a computer science background.</a:t>
+            </a:r>
+          </a:p>
+          <a:p>
+            <a:r>
+              <a:rPr lang="en-US" dirty="0"/>
+              <a:t>If you prefer structured, self-paced learning you can dip into on your own schedule, my </a:t>
+            </a:r>
+            <a:r>
+              <a:rPr lang="en-US" b="1" dirty="0"/>
+              <a:t>LinkedIn Learning</a:t>
+            </a:r>
+            <a:r>
+              <a:rPr lang="en-US" dirty="0"/>
+              <a:t> courses are a good fit. They’re designed to be clear, sequenced, and easy to revisit when you need a refresher.</a:t>
+            </a:r>
+          </a:p>
+          <a:p>
+            <a:r>
+              <a:rPr lang="en-US" dirty="0"/>
+              <a:t>If you want live, hands-on training where you can ask questions and work through examples in real time, that’s where </a:t>
+            </a:r>
+            <a:r>
+              <a:rPr lang="en-US" b="1" dirty="0"/>
+              <a:t>O’Reilly sessions</a:t>
+            </a:r>
+            <a:r>
+              <a:rPr lang="en-US" dirty="0"/>
+              <a:t> or </a:t>
+            </a:r>
+            <a:r>
+              <a:rPr lang="en-US" b="1" dirty="0"/>
+              <a:t>Eventbrite workshops</a:t>
+            </a:r>
+            <a:r>
+              <a:rPr lang="en-US" dirty="0"/>
+              <a:t> make the most sense. That’s for people who learn best by doing, with guidance.</a:t>
+            </a:r>
+          </a:p>
+          <a:p>
+            <a:r>
+              <a:rPr lang="en-US" dirty="0"/>
+              <a:t>And if what you want is ongoing guidance without committing to a large, one-time course, </a:t>
+            </a:r>
+            <a:r>
+              <a:rPr lang="en-US" b="1" dirty="0"/>
+              <a:t>The Modern Excel AI Stack</a:t>
+            </a:r>
+            <a:r>
+              <a:rPr lang="en-US" dirty="0"/>
+              <a:t> membership is meant to fill that gap. It’s there for continued direction as tools evolve and new questions come up, so you’re not constantly restarting from scratch.</a:t>
+            </a:r>
+          </a:p>
+          <a:p>
+            <a:endParaRPr lang="en-US" dirty="0"/>
+          </a:p>
+        </p:txBody>
+      </p:sp>
+      <p:sp>
+        <p:nvSpPr>
+          <p:cNvPr id="4" name="Slide Number Placeholder 3"/>
+          <p:cNvSpPr>
+            <a:spLocks noGrp="1"/>
+          </p:cNvSpPr>
+          <p:nvPr>
+            <p:ph type="sldNum" sz="quarter" idx="5"/>
+          </p:nvPr>
+        </p:nvSpPr>
+        <p:spPr/>
+        <p:txBody>
+          <a:bodyPr/>
+          <a:lstStyle/>
+          <a:p>
             <a:fld id="{FFB500C5-13F7-48FC-8160-C29AECF6C602}" type="slidenum">
               <a:rPr lang="en-US" smtClean="0"/>
-              <a:t>11</a:t>
+              <a:t>13</a:t>
             </a:fld>
             <a:endParaRPr lang="en-US"/>
           </a:p>
@@ -4530,7 +4745,7 @@
             <a:fld id="{1D8BD707-D9CF-40AE-B4C6-C98DA3205C09}" type="datetimeFigureOut">
               <a:rPr lang="en-US" smtClean="0"/>
               <a:pPr/>
-              <a:t>1/19/2026</a:t>
+              <a:t>1/29/2026</a:t>
             </a:fld>
             <a:endParaRPr lang="en-US"/>
           </a:p>
@@ -4695,7 +4910,7 @@
             <a:fld id="{1D8BD707-D9CF-40AE-B4C6-C98DA3205C09}" type="datetimeFigureOut">
               <a:rPr lang="en-US" smtClean="0"/>
               <a:pPr/>
-              <a:t>1/19/2026</a:t>
+              <a:t>1/29/2026</a:t>
             </a:fld>
             <a:endParaRPr lang="en-US"/>
           </a:p>
@@ -4870,7 +5085,7 @@
             <a:fld id="{1D8BD707-D9CF-40AE-B4C6-C98DA3205C09}" type="datetimeFigureOut">
               <a:rPr lang="en-US" smtClean="0"/>
               <a:pPr/>
-              <a:t>1/19/2026</a:t>
+              <a:t>1/29/2026</a:t>
             </a:fld>
             <a:endParaRPr lang="en-US"/>
           </a:p>
@@ -5035,7 +5250,7 @@
             <a:fld id="{1D8BD707-D9CF-40AE-B4C6-C98DA3205C09}" type="datetimeFigureOut">
               <a:rPr lang="en-US" smtClean="0"/>
               <a:pPr/>
-              <a:t>1/19/2026</a:t>
+              <a:t>1/29/2026</a:t>
             </a:fld>
             <a:endParaRPr lang="en-US"/>
           </a:p>
@@ -5277,7 +5492,7 @@
             <a:fld id="{1D8BD707-D9CF-40AE-B4C6-C98DA3205C09}" type="datetimeFigureOut">
               <a:rPr lang="en-US" smtClean="0"/>
               <a:pPr/>
-              <a:t>1/19/2026</a:t>
+              <a:t>1/29/2026</a:t>
             </a:fld>
             <a:endParaRPr lang="en-US"/>
           </a:p>
@@ -5559,7 +5774,7 @@
             <a:fld id="{1D8BD707-D9CF-40AE-B4C6-C98DA3205C09}" type="datetimeFigureOut">
               <a:rPr lang="en-US" smtClean="0"/>
               <a:pPr/>
-              <a:t>1/19/2026</a:t>
+              <a:t>1/29/2026</a:t>
             </a:fld>
             <a:endParaRPr lang="en-US"/>
           </a:p>
@@ -5975,7 +6190,7 @@
             <a:fld id="{1D8BD707-D9CF-40AE-B4C6-C98DA3205C09}" type="datetimeFigureOut">
               <a:rPr lang="en-US" smtClean="0"/>
               <a:pPr/>
-              <a:t>1/19/2026</a:t>
+              <a:t>1/29/2026</a:t>
             </a:fld>
             <a:endParaRPr lang="en-US"/>
           </a:p>
@@ -6089,7 +6304,7 @@
             <a:fld id="{1D8BD707-D9CF-40AE-B4C6-C98DA3205C09}" type="datetimeFigureOut">
               <a:rPr lang="en-US" smtClean="0"/>
               <a:pPr/>
-              <a:t>1/19/2026</a:t>
+              <a:t>1/29/2026</a:t>
             </a:fld>
             <a:endParaRPr lang="en-US"/>
           </a:p>
@@ -6181,7 +6396,7 @@
             <a:fld id="{1D8BD707-D9CF-40AE-B4C6-C98DA3205C09}" type="datetimeFigureOut">
               <a:rPr lang="en-US" smtClean="0"/>
               <a:pPr/>
-              <a:t>1/19/2026</a:t>
+              <a:t>1/29/2026</a:t>
             </a:fld>
             <a:endParaRPr lang="en-US"/>
           </a:p>
@@ -6453,7 +6668,7 @@
             <a:fld id="{1D8BD707-D9CF-40AE-B4C6-C98DA3205C09}" type="datetimeFigureOut">
               <a:rPr lang="en-US" smtClean="0"/>
               <a:pPr/>
-              <a:t>1/19/2026</a:t>
+              <a:t>1/29/2026</a:t>
             </a:fld>
             <a:endParaRPr lang="en-US"/>
           </a:p>
@@ -6702,7 +6917,7 @@
             <a:fld id="{1D8BD707-D9CF-40AE-B4C6-C98DA3205C09}" type="datetimeFigureOut">
               <a:rPr lang="en-US" smtClean="0"/>
               <a:pPr/>
-              <a:t>1/19/2026</a:t>
+              <a:t>1/29/2026</a:t>
             </a:fld>
             <a:endParaRPr lang="en-US"/>
           </a:p>
@@ -6915,7 +7130,7 @@
             <a:fld id="{1D8BD707-D9CF-40AE-B4C6-C98DA3205C09}" type="datetimeFigureOut">
               <a:rPr lang="en-US" smtClean="0"/>
               <a:pPr/>
-              <a:t>1/19/2026</a:t>
+              <a:t>1/29/2026</a:t>
             </a:fld>
             <a:endParaRPr lang="en-US"/>
           </a:p>
@@ -7448,6 +7663,591 @@
   <p:cSld>
     <p:spTree>
       <p:nvGrpSpPr>
+        <p:cNvPr id="1" name="">
+          <a:extLst>
+            <a:ext uri="{FF2B5EF4-FFF2-40B4-BE49-F238E27FC236}">
+              <a16:creationId xmlns:a16="http://schemas.microsoft.com/office/drawing/2014/main" id="{41032428-543A-1FB6-4F74-63D34C7EE7A7}"/>
+            </a:ext>
+          </a:extLst>
+        </p:cNvPr>
+        <p:cNvGrpSpPr/>
+        <p:nvPr/>
+      </p:nvGrpSpPr>
+      <p:grpSpPr>
+        <a:xfrm>
+          <a:off x="0" y="0"/>
+          <a:ext cx="0" cy="0"/>
+          <a:chOff x="0" y="0"/>
+          <a:chExt cx="0" cy="0"/>
+        </a:xfrm>
+      </p:grpSpPr>
+      <p:sp>
+        <p:nvSpPr>
+          <p:cNvPr id="11" name="TextBox 10">
+            <a:extLst>
+              <a:ext uri="{FF2B5EF4-FFF2-40B4-BE49-F238E27FC236}">
+                <a16:creationId xmlns:a16="http://schemas.microsoft.com/office/drawing/2014/main" id="{B10226A7-24F8-E564-1775-ADA2DA03E717}"/>
+              </a:ext>
+            </a:extLst>
+          </p:cNvPr>
+          <p:cNvSpPr txBox="1"/>
+          <p:nvPr/>
+        </p:nvSpPr>
+        <p:spPr>
+          <a:xfrm>
+            <a:off x="520861" y="170082"/>
+            <a:ext cx="11979797" cy="1477328"/>
+          </a:xfrm>
+          <a:prstGeom prst="rect">
+            <a:avLst/>
+          </a:prstGeom>
+          <a:noFill/>
+        </p:spPr>
+        <p:txBody>
+          <a:bodyPr wrap="square" rtlCol="0">
+            <a:spAutoFit/>
+          </a:bodyPr>
+          <a:lstStyle/>
+          <a:p>
+            <a:r>
+              <a:rPr lang="en-US" sz="9000" dirty="0">
+                <a:latin typeface="Aliens &amp; cows" panose="00000500000000000000" pitchFamily="2" charset="0"/>
+              </a:rPr>
+              <a:t>Free!</a:t>
+            </a:r>
+          </a:p>
+        </p:txBody>
+      </p:sp>
+      <p:sp>
+        <p:nvSpPr>
+          <p:cNvPr id="3" name="TextBox 2">
+            <a:extLst>
+              <a:ext uri="{FF2B5EF4-FFF2-40B4-BE49-F238E27FC236}">
+                <a16:creationId xmlns:a16="http://schemas.microsoft.com/office/drawing/2014/main" id="{AD6CB09B-7406-0F2F-D781-339748F9E539}"/>
+              </a:ext>
+            </a:extLst>
+          </p:cNvPr>
+          <p:cNvSpPr txBox="1"/>
+          <p:nvPr/>
+        </p:nvSpPr>
+        <p:spPr>
+          <a:xfrm>
+            <a:off x="990600" y="2095500"/>
+            <a:ext cx="8546939" cy="6555641"/>
+          </a:xfrm>
+          <a:prstGeom prst="rect">
+            <a:avLst/>
+          </a:prstGeom>
+          <a:noFill/>
+        </p:spPr>
+        <p:txBody>
+          <a:bodyPr wrap="square" rtlCol="0">
+            <a:spAutoFit/>
+          </a:bodyPr>
+          <a:lstStyle/>
+          <a:p>
+            <a:pPr marL="685800" indent="-685800">
+              <a:buClr>
+                <a:srgbClr val="CF3338"/>
+              </a:buClr>
+              <a:buFont typeface="Arial" panose="020B0604020202020204" pitchFamily="34" charset="0"/>
+              <a:buChar char="•"/>
+            </a:pPr>
+            <a:r>
+              <a:rPr lang="en-US" sz="6000" dirty="0">
+                <a:solidFill>
+                  <a:srgbClr val="707070"/>
+                </a:solidFill>
+                <a:latin typeface="Pragmatica" panose="020B0403040502020204" pitchFamily="34" charset="0"/>
+              </a:rPr>
+              <a:t>Blog: </a:t>
+            </a:r>
+            <a:r>
+              <a:rPr lang="en-US" sz="6000" dirty="0">
+                <a:solidFill>
+                  <a:srgbClr val="CF3338"/>
+                </a:solidFill>
+                <a:latin typeface="Pragmatica" panose="020B0403040502020204" pitchFamily="34" charset="0"/>
+                <a:hlinkClick r:id="rId2">
+                  <a:extLst>
+                    <a:ext uri="{A12FA001-AC4F-418D-AE19-62706E023703}">
+                      <ahyp:hlinkClr xmlns:ahyp="http://schemas.microsoft.com/office/drawing/2018/hyperlinkcolor" val="tx"/>
+                    </a:ext>
+                  </a:extLst>
+                </a:hlinkClick>
+              </a:rPr>
+              <a:t>stringfestanalytics.com</a:t>
+            </a:r>
+            <a:r>
+              <a:rPr lang="en-US" sz="6000" dirty="0">
+                <a:solidFill>
+                  <a:srgbClr val="707070"/>
+                </a:solidFill>
+                <a:latin typeface="Pragmatica" panose="020B0403040502020204" pitchFamily="34" charset="0"/>
+              </a:rPr>
+              <a:t>  </a:t>
+            </a:r>
+          </a:p>
+          <a:p>
+            <a:pPr marL="685800" indent="-685800">
+              <a:buClr>
+                <a:srgbClr val="CF3338"/>
+              </a:buClr>
+              <a:buFont typeface="Arial" panose="020B0604020202020204" pitchFamily="34" charset="0"/>
+              <a:buChar char="•"/>
+            </a:pPr>
+            <a:r>
+              <a:rPr lang="en-US" sz="6000" dirty="0">
+                <a:solidFill>
+                  <a:srgbClr val="707070"/>
+                </a:solidFill>
+                <a:latin typeface="Pragmatica" panose="020B0403040502020204" pitchFamily="34" charset="0"/>
+              </a:rPr>
+              <a:t>Newsletter/email course: Subscribe at blog</a:t>
+            </a:r>
+          </a:p>
+          <a:p>
+            <a:pPr marL="685800" indent="-685800">
+              <a:buClr>
+                <a:srgbClr val="CF3338"/>
+              </a:buClr>
+              <a:buFont typeface="Arial" panose="020B0604020202020204" pitchFamily="34" charset="0"/>
+              <a:buChar char="•"/>
+            </a:pPr>
+            <a:r>
+              <a:rPr lang="en-US" sz="6000" dirty="0">
+                <a:solidFill>
+                  <a:srgbClr val="CF3338"/>
+                </a:solidFill>
+                <a:latin typeface="Pragmatica" panose="020B0403040502020204" pitchFamily="34" charset="0"/>
+                <a:hlinkClick r:id="rId3">
+                  <a:extLst>
+                    <a:ext uri="{A12FA001-AC4F-418D-AE19-62706E023703}">
+                      <ahyp:hlinkClr xmlns:ahyp="http://schemas.microsoft.com/office/drawing/2018/hyperlinkcolor" val="tx"/>
+                    </a:ext>
+                  </a:extLst>
+                </a:hlinkClick>
+              </a:rPr>
+              <a:t>LinkedIn</a:t>
+            </a:r>
+            <a:r>
+              <a:rPr lang="en-US" sz="6000" dirty="0">
+                <a:solidFill>
+                  <a:srgbClr val="707070"/>
+                </a:solidFill>
+                <a:latin typeface="Pragmatica" panose="020B0403040502020204" pitchFamily="34" charset="0"/>
+              </a:rPr>
+              <a:t>: Follow for daily(</a:t>
+            </a:r>
+            <a:r>
+              <a:rPr lang="en-US" sz="6000" dirty="0" err="1">
+                <a:solidFill>
+                  <a:srgbClr val="707070"/>
+                </a:solidFill>
+                <a:latin typeface="Pragmatica" panose="020B0403040502020204" pitchFamily="34" charset="0"/>
+              </a:rPr>
+              <a:t>ish</a:t>
+            </a:r>
+            <a:r>
+              <a:rPr lang="en-US" sz="6000" dirty="0">
+                <a:solidFill>
+                  <a:srgbClr val="707070"/>
+                </a:solidFill>
+                <a:latin typeface="Pragmatica" panose="020B0403040502020204" pitchFamily="34" charset="0"/>
+              </a:rPr>
+              <a:t>) free resources</a:t>
+            </a:r>
+          </a:p>
+        </p:txBody>
+      </p:sp>
+      <p:pic>
+        <p:nvPicPr>
+          <p:cNvPr id="15" name="Picture 14" descr="A close up of a sign&#10;&#10;Description automatically generated">
+            <a:extLst>
+              <a:ext uri="{FF2B5EF4-FFF2-40B4-BE49-F238E27FC236}">
+                <a16:creationId xmlns:a16="http://schemas.microsoft.com/office/drawing/2014/main" id="{0FC37808-A34B-5C68-C9BC-F79DB06A951B}"/>
+              </a:ext>
+            </a:extLst>
+          </p:cNvPr>
+          <p:cNvPicPr>
+            <a:picLocks noChangeAspect="1"/>
+          </p:cNvPicPr>
+          <p:nvPr/>
+        </p:nvPicPr>
+        <p:blipFill>
+          <a:blip r:embed="rId4">
+            <a:extLst>
+              <a:ext uri="{28A0092B-C50C-407E-A947-70E740481C1C}">
+                <a14:useLocalDpi xmlns:a14="http://schemas.microsoft.com/office/drawing/2010/main" val="0"/>
+              </a:ext>
+            </a:extLst>
+          </a:blip>
+          <a:stretch>
+            <a:fillRect/>
+          </a:stretch>
+        </p:blipFill>
+        <p:spPr>
+          <a:xfrm>
+            <a:off x="16341036" y="8058429"/>
+            <a:ext cx="1942857" cy="2228571"/>
+          </a:xfrm>
+          <a:prstGeom prst="rect">
+            <a:avLst/>
+          </a:prstGeom>
+        </p:spPr>
+      </p:pic>
+      <p:pic>
+        <p:nvPicPr>
+          <p:cNvPr id="2" name="Picture 1" descr="No alternative text description for this image">
+            <a:extLst>
+              <a:ext uri="{FF2B5EF4-FFF2-40B4-BE49-F238E27FC236}">
+                <a16:creationId xmlns:a16="http://schemas.microsoft.com/office/drawing/2014/main" id="{67292FAA-CD5F-946F-10C1-3DA65714AC96}"/>
+              </a:ext>
+            </a:extLst>
+          </p:cNvPr>
+          <p:cNvPicPr>
+            <a:picLocks noChangeAspect="1"/>
+          </p:cNvPicPr>
+          <p:nvPr/>
+        </p:nvPicPr>
+        <p:blipFill>
+          <a:blip r:embed="rId5"/>
+          <a:stretch>
+            <a:fillRect/>
+          </a:stretch>
+        </p:blipFill>
+        <p:spPr>
+          <a:xfrm>
+            <a:off x="9906000" y="1257300"/>
+            <a:ext cx="8077200" cy="5384800"/>
+          </a:xfrm>
+          <a:prstGeom prst="rect">
+            <a:avLst/>
+          </a:prstGeom>
+        </p:spPr>
+      </p:pic>
+    </p:spTree>
+    <p:extLst>
+      <p:ext uri="{BB962C8B-B14F-4D97-AF65-F5344CB8AC3E}">
+        <p14:creationId xmlns:p14="http://schemas.microsoft.com/office/powerpoint/2010/main" val="2825019953"/>
+      </p:ext>
+    </p:extLst>
+  </p:cSld>
+  <p:clrMapOvr>
+    <a:masterClrMapping/>
+  </p:clrMapOvr>
+</p:sld>
+</file>
+
+<file path=ppt/slides/slide11.xml><?xml version="1.0" encoding="utf-8"?>
+<p:sld xmlns:a="http://schemas.openxmlformats.org/drawingml/2006/main" xmlns:r="http://schemas.openxmlformats.org/officeDocument/2006/relationships" xmlns:p="http://schemas.openxmlformats.org/presentationml/2006/main">
+  <p:cSld>
+    <p:spTree>
+      <p:nvGrpSpPr>
+        <p:cNvPr id="1" name="">
+          <a:extLst>
+            <a:ext uri="{FF2B5EF4-FFF2-40B4-BE49-F238E27FC236}">
+              <a16:creationId xmlns:a16="http://schemas.microsoft.com/office/drawing/2014/main" id="{B54A7281-8A5D-AF68-7E15-AF7741A2D78A}"/>
+            </a:ext>
+          </a:extLst>
+        </p:cNvPr>
+        <p:cNvGrpSpPr/>
+        <p:nvPr/>
+      </p:nvGrpSpPr>
+      <p:grpSpPr>
+        <a:xfrm>
+          <a:off x="0" y="0"/>
+          <a:ext cx="0" cy="0"/>
+          <a:chOff x="0" y="0"/>
+          <a:chExt cx="0" cy="0"/>
+        </a:xfrm>
+      </p:grpSpPr>
+      <p:sp>
+        <p:nvSpPr>
+          <p:cNvPr id="11" name="TextBox 10">
+            <a:extLst>
+              <a:ext uri="{FF2B5EF4-FFF2-40B4-BE49-F238E27FC236}">
+                <a16:creationId xmlns:a16="http://schemas.microsoft.com/office/drawing/2014/main" id="{E8953D25-E302-D215-CA86-7ED7A621F0F3}"/>
+              </a:ext>
+            </a:extLst>
+          </p:cNvPr>
+          <p:cNvSpPr txBox="1"/>
+          <p:nvPr/>
+        </p:nvSpPr>
+        <p:spPr>
+          <a:xfrm>
+            <a:off x="520861" y="170082"/>
+            <a:ext cx="4889339" cy="4247317"/>
+          </a:xfrm>
+          <a:prstGeom prst="rect">
+            <a:avLst/>
+          </a:prstGeom>
+          <a:noFill/>
+        </p:spPr>
+        <p:txBody>
+          <a:bodyPr wrap="square" rtlCol="0">
+            <a:spAutoFit/>
+          </a:bodyPr>
+          <a:lstStyle/>
+          <a:p>
+            <a:r>
+              <a:rPr lang="en-US" sz="9000" dirty="0">
+                <a:latin typeface="Aliens &amp; cows" panose="00000500000000000000" pitchFamily="2" charset="0"/>
+              </a:rPr>
+              <a:t>Why not stop at free?</a:t>
+            </a:r>
+          </a:p>
+        </p:txBody>
+      </p:sp>
+      <p:pic>
+        <p:nvPicPr>
+          <p:cNvPr id="15" name="Picture 14" descr="A close up of a sign&#10;&#10;Description automatically generated">
+            <a:extLst>
+              <a:ext uri="{FF2B5EF4-FFF2-40B4-BE49-F238E27FC236}">
+                <a16:creationId xmlns:a16="http://schemas.microsoft.com/office/drawing/2014/main" id="{AC82ECB6-E6FE-DDE5-7269-AB90DC1212AB}"/>
+              </a:ext>
+            </a:extLst>
+          </p:cNvPr>
+          <p:cNvPicPr>
+            <a:picLocks noChangeAspect="1"/>
+          </p:cNvPicPr>
+          <p:nvPr/>
+        </p:nvPicPr>
+        <p:blipFill>
+          <a:blip r:embed="rId3">
+            <a:extLst>
+              <a:ext uri="{28A0092B-C50C-407E-A947-70E740481C1C}">
+                <a14:useLocalDpi xmlns:a14="http://schemas.microsoft.com/office/drawing/2010/main" val="0"/>
+              </a:ext>
+            </a:extLst>
+          </a:blip>
+          <a:stretch>
+            <a:fillRect/>
+          </a:stretch>
+        </p:blipFill>
+        <p:spPr>
+          <a:xfrm>
+            <a:off x="16341036" y="8058429"/>
+            <a:ext cx="1942857" cy="2228571"/>
+          </a:xfrm>
+          <a:prstGeom prst="rect">
+            <a:avLst/>
+          </a:prstGeom>
+        </p:spPr>
+      </p:pic>
+      <p:pic>
+        <p:nvPicPr>
+          <p:cNvPr id="9" name="Picture 8" descr="Image">
+            <a:extLst>
+              <a:ext uri="{FF2B5EF4-FFF2-40B4-BE49-F238E27FC236}">
+                <a16:creationId xmlns:a16="http://schemas.microsoft.com/office/drawing/2014/main" id="{15892E52-DDDD-BA54-D242-9974FFD58BA2}"/>
+              </a:ext>
+            </a:extLst>
+          </p:cNvPr>
+          <p:cNvPicPr>
+            <a:picLocks noChangeAspect="1"/>
+          </p:cNvPicPr>
+          <p:nvPr/>
+        </p:nvPicPr>
+        <p:blipFill>
+          <a:blip r:embed="rId4"/>
+          <a:stretch>
+            <a:fillRect/>
+          </a:stretch>
+        </p:blipFill>
+        <p:spPr>
+          <a:xfrm>
+            <a:off x="5867400" y="419100"/>
+            <a:ext cx="10668000" cy="7107555"/>
+          </a:xfrm>
+          <a:prstGeom prst="rect">
+            <a:avLst/>
+          </a:prstGeom>
+        </p:spPr>
+      </p:pic>
+      <p:sp>
+        <p:nvSpPr>
+          <p:cNvPr id="10" name="TextBox 9">
+            <a:extLst>
+              <a:ext uri="{FF2B5EF4-FFF2-40B4-BE49-F238E27FC236}">
+                <a16:creationId xmlns:a16="http://schemas.microsoft.com/office/drawing/2014/main" id="{C0564D0D-700B-22A4-4B8A-8FDA84184A01}"/>
+              </a:ext>
+            </a:extLst>
+          </p:cNvPr>
+          <p:cNvSpPr txBox="1"/>
+          <p:nvPr/>
+        </p:nvSpPr>
+        <p:spPr>
+          <a:xfrm>
+            <a:off x="5867400" y="8058429"/>
+            <a:ext cx="10058400" cy="369332"/>
+          </a:xfrm>
+          <a:prstGeom prst="rect">
+            <a:avLst/>
+          </a:prstGeom>
+          <a:noFill/>
+        </p:spPr>
+        <p:txBody>
+          <a:bodyPr wrap="square" rtlCol="0">
+            <a:spAutoFit/>
+          </a:bodyPr>
+          <a:lstStyle/>
+          <a:p>
+            <a:r>
+              <a:rPr lang="en-US" dirty="0"/>
+              <a:t>S</a:t>
+            </a:r>
+          </a:p>
+        </p:txBody>
+      </p:sp>
+      <p:sp>
+        <p:nvSpPr>
+          <p:cNvPr id="14" name="TextBox 13">
+            <a:extLst>
+              <a:ext uri="{FF2B5EF4-FFF2-40B4-BE49-F238E27FC236}">
+                <a16:creationId xmlns:a16="http://schemas.microsoft.com/office/drawing/2014/main" id="{538D5CE6-1962-62F3-C966-A47A010AE0BB}"/>
+              </a:ext>
+            </a:extLst>
+          </p:cNvPr>
+          <p:cNvSpPr txBox="1"/>
+          <p:nvPr/>
+        </p:nvSpPr>
+        <p:spPr>
+          <a:xfrm>
+            <a:off x="6005546" y="7695781"/>
+            <a:ext cx="4419600" cy="1815882"/>
+          </a:xfrm>
+          <a:prstGeom prst="rect">
+            <a:avLst/>
+          </a:prstGeom>
+          <a:noFill/>
+        </p:spPr>
+        <p:txBody>
+          <a:bodyPr wrap="square">
+            <a:spAutoFit/>
+          </a:bodyPr>
+          <a:lstStyle/>
+          <a:p>
+            <a:r>
+              <a:rPr lang="en-US" sz="2800" b="1" dirty="0"/>
+              <a:t>Free content is good for</a:t>
+            </a:r>
+          </a:p>
+          <a:p>
+            <a:pPr marL="285750" indent="-285750">
+              <a:buFont typeface="Arial" panose="020B0604020202020204" pitchFamily="34" charset="0"/>
+              <a:buChar char="•"/>
+            </a:pPr>
+            <a:r>
+              <a:rPr lang="en-US" sz="2800" dirty="0"/>
+              <a:t>Orientation</a:t>
+            </a:r>
+          </a:p>
+          <a:p>
+            <a:pPr marL="285750" indent="-285750">
+              <a:buFont typeface="Arial" panose="020B0604020202020204" pitchFamily="34" charset="0"/>
+              <a:buChar char="•"/>
+            </a:pPr>
+            <a:r>
+              <a:rPr lang="en-US" sz="2800" dirty="0"/>
+              <a:t>Pattern exposure</a:t>
+            </a:r>
+          </a:p>
+          <a:p>
+            <a:pPr marL="285750" indent="-285750">
+              <a:buFont typeface="Arial" panose="020B0604020202020204" pitchFamily="34" charset="0"/>
+              <a:buChar char="•"/>
+            </a:pPr>
+            <a:r>
+              <a:rPr lang="en-US" sz="2800" dirty="0"/>
+              <a:t>Seeing examples in context</a:t>
+            </a:r>
+          </a:p>
+        </p:txBody>
+      </p:sp>
+      <p:sp>
+        <p:nvSpPr>
+          <p:cNvPr id="16" name="TextBox 15">
+            <a:extLst>
+              <a:ext uri="{FF2B5EF4-FFF2-40B4-BE49-F238E27FC236}">
+                <a16:creationId xmlns:a16="http://schemas.microsoft.com/office/drawing/2014/main" id="{3753DF97-EFFE-90D8-3C5C-903CC3B89938}"/>
+              </a:ext>
+            </a:extLst>
+          </p:cNvPr>
+          <p:cNvSpPr txBox="1"/>
+          <p:nvPr/>
+        </p:nvSpPr>
+        <p:spPr>
+          <a:xfrm>
+            <a:off x="11322827" y="7695781"/>
+            <a:ext cx="4602973" cy="2246769"/>
+          </a:xfrm>
+          <a:prstGeom prst="rect">
+            <a:avLst/>
+          </a:prstGeom>
+          <a:noFill/>
+        </p:spPr>
+        <p:txBody>
+          <a:bodyPr wrap="square">
+            <a:spAutoFit/>
+          </a:bodyPr>
+          <a:lstStyle/>
+          <a:p>
+            <a:r>
+              <a:rPr lang="en-US" sz="2800" b="1" dirty="0"/>
+              <a:t>Paid content is good for</a:t>
+            </a:r>
+          </a:p>
+          <a:p>
+            <a:pPr marL="285750" indent="-285750">
+              <a:buFont typeface="Arial" panose="020B0604020202020204" pitchFamily="34" charset="0"/>
+              <a:buChar char="•"/>
+            </a:pPr>
+            <a:r>
+              <a:rPr lang="en-US" sz="2800" dirty="0"/>
+              <a:t>Solving specific problems</a:t>
+            </a:r>
+          </a:p>
+          <a:p>
+            <a:pPr marL="285750" indent="-285750">
+              <a:buFont typeface="Arial" panose="020B0604020202020204" pitchFamily="34" charset="0"/>
+              <a:buChar char="•"/>
+            </a:pPr>
+            <a:r>
+              <a:rPr lang="en-US" sz="2800" dirty="0"/>
+              <a:t>Step-by-step implementation</a:t>
+            </a:r>
+          </a:p>
+          <a:p>
+            <a:pPr marL="285750" indent="-285750">
+              <a:buFont typeface="Arial" panose="020B0604020202020204" pitchFamily="34" charset="0"/>
+              <a:buChar char="•"/>
+            </a:pPr>
+            <a:r>
+              <a:rPr lang="en-US" sz="2800" dirty="0"/>
+              <a:t>Ongoing feedback</a:t>
+            </a:r>
+          </a:p>
+        </p:txBody>
+      </p:sp>
+    </p:spTree>
+    <p:extLst>
+      <p:ext uri="{BB962C8B-B14F-4D97-AF65-F5344CB8AC3E}">
+        <p14:creationId xmlns:p14="http://schemas.microsoft.com/office/powerpoint/2010/main" val="2007327747"/>
+      </p:ext>
+    </p:extLst>
+  </p:cSld>
+  <p:clrMapOvr>
+    <a:masterClrMapping/>
+  </p:clrMapOvr>
+</p:sld>
+</file>
+
+<file path=ppt/slides/slide12.xml><?xml version="1.0" encoding="utf-8"?>
+<p:sld xmlns:a="http://schemas.openxmlformats.org/drawingml/2006/main" xmlns:r="http://schemas.openxmlformats.org/officeDocument/2006/relationships" xmlns:p="http://schemas.openxmlformats.org/presentationml/2006/main">
+  <p:cSld>
+    <p:spTree>
+      <p:nvGrpSpPr>
         <p:cNvPr id="1" name=""/>
         <p:cNvGrpSpPr/>
         <p:nvPr/>
@@ -7539,7 +8339,7 @@
 </p:sld>
 </file>
 
-<file path=ppt/slides/slide11.xml><?xml version="1.0" encoding="utf-8"?>
+<file path=ppt/slides/slide13.xml><?xml version="1.0" encoding="utf-8"?>
 <p:sld xmlns:a="http://schemas.openxmlformats.org/drawingml/2006/main" xmlns:r="http://schemas.openxmlformats.org/officeDocument/2006/relationships" xmlns:p="http://schemas.openxmlformats.org/presentationml/2006/main">
   <p:cSld>
     <p:spTree>
@@ -7809,505 +8609,284 @@
   <p:clrMapOvr>
     <a:masterClrMapping/>
   </p:clrMapOvr>
-</p:sld>
-</file>
-
-<file path=ppt/slides/slide12.xml><?xml version="1.0" encoding="utf-8"?>
-<p:sld xmlns:a="http://schemas.openxmlformats.org/drawingml/2006/main" xmlns:r="http://schemas.openxmlformats.org/officeDocument/2006/relationships" xmlns:p="http://schemas.openxmlformats.org/presentationml/2006/main">
-  <p:cSld>
-    <p:spTree>
-      <p:nvGrpSpPr>
-        <p:cNvPr id="1" name="">
-          <a:extLst>
-            <a:ext uri="{FF2B5EF4-FFF2-40B4-BE49-F238E27FC236}">
-              <a16:creationId xmlns:a16="http://schemas.microsoft.com/office/drawing/2014/main" id="{41032428-543A-1FB6-4F74-63D34C7EE7A7}"/>
-            </a:ext>
-          </a:extLst>
-        </p:cNvPr>
-        <p:cNvGrpSpPr/>
-        <p:nvPr/>
-      </p:nvGrpSpPr>
-      <p:grpSpPr>
-        <a:xfrm>
-          <a:off x="0" y="0"/>
-          <a:ext cx="0" cy="0"/>
-          <a:chOff x="0" y="0"/>
-          <a:chExt cx="0" cy="0"/>
-        </a:xfrm>
-      </p:grpSpPr>
-      <p:sp>
-        <p:nvSpPr>
-          <p:cNvPr id="11" name="TextBox 10">
-            <a:extLst>
-              <a:ext uri="{FF2B5EF4-FFF2-40B4-BE49-F238E27FC236}">
-                <a16:creationId xmlns:a16="http://schemas.microsoft.com/office/drawing/2014/main" id="{B10226A7-24F8-E564-1775-ADA2DA03E717}"/>
-              </a:ext>
-            </a:extLst>
-          </p:cNvPr>
-          <p:cNvSpPr txBox="1"/>
-          <p:nvPr/>
-        </p:nvSpPr>
-        <p:spPr>
-          <a:xfrm>
-            <a:off x="520861" y="170082"/>
-            <a:ext cx="11979797" cy="1477328"/>
-          </a:xfrm>
-          <a:prstGeom prst="rect">
-            <a:avLst/>
-          </a:prstGeom>
-          <a:noFill/>
-        </p:spPr>
-        <p:txBody>
-          <a:bodyPr wrap="square" rtlCol="0">
-            <a:spAutoFit/>
-          </a:bodyPr>
-          <a:lstStyle/>
-          <a:p>
-            <a:r>
-              <a:rPr lang="en-US" sz="9000" dirty="0">
-                <a:latin typeface="Aliens &amp; cows" panose="00000500000000000000" pitchFamily="2" charset="0"/>
-              </a:rPr>
-              <a:t>Free!</a:t>
-            </a:r>
-          </a:p>
-        </p:txBody>
-      </p:sp>
-      <p:sp>
-        <p:nvSpPr>
-          <p:cNvPr id="3" name="TextBox 2">
-            <a:extLst>
-              <a:ext uri="{FF2B5EF4-FFF2-40B4-BE49-F238E27FC236}">
-                <a16:creationId xmlns:a16="http://schemas.microsoft.com/office/drawing/2014/main" id="{AD6CB09B-7406-0F2F-D781-339748F9E539}"/>
-              </a:ext>
-            </a:extLst>
-          </p:cNvPr>
-          <p:cNvSpPr txBox="1"/>
-          <p:nvPr/>
-        </p:nvSpPr>
-        <p:spPr>
-          <a:xfrm>
-            <a:off x="520861" y="3191948"/>
-            <a:ext cx="14393120" cy="3785652"/>
-          </a:xfrm>
-          <a:prstGeom prst="rect">
-            <a:avLst/>
-          </a:prstGeom>
-          <a:noFill/>
-        </p:spPr>
-        <p:txBody>
-          <a:bodyPr wrap="square" rtlCol="0">
-            <a:spAutoFit/>
-          </a:bodyPr>
-          <a:lstStyle/>
-          <a:p>
-            <a:pPr marL="685800" indent="-685800">
-              <a:buClr>
-                <a:srgbClr val="CF3338"/>
-              </a:buClr>
-              <a:buFont typeface="Arial" panose="020B0604020202020204" pitchFamily="34" charset="0"/>
-              <a:buChar char="•"/>
-            </a:pPr>
-            <a:r>
-              <a:rPr lang="en-US" sz="6000" dirty="0">
-                <a:solidFill>
-                  <a:srgbClr val="707070"/>
-                </a:solidFill>
-                <a:latin typeface="Pragmatica" panose="020B0403040502020204" pitchFamily="34" charset="0"/>
-              </a:rPr>
-              <a:t>Blog: </a:t>
-            </a:r>
-            <a:r>
-              <a:rPr lang="en-US" sz="6000" dirty="0">
-                <a:solidFill>
-                  <a:srgbClr val="CF3338"/>
-                </a:solidFill>
-                <a:latin typeface="Pragmatica" panose="020B0403040502020204" pitchFamily="34" charset="0"/>
-                <a:hlinkClick r:id="rId2">
-                  <a:extLst>
-                    <a:ext uri="{A12FA001-AC4F-418D-AE19-62706E023703}">
-                      <ahyp:hlinkClr xmlns:ahyp="http://schemas.microsoft.com/office/drawing/2018/hyperlinkcolor" val="tx"/>
-                    </a:ext>
-                  </a:extLst>
-                </a:hlinkClick>
-              </a:rPr>
-              <a:t>stringfestanalytics.com</a:t>
-            </a:r>
-            <a:r>
-              <a:rPr lang="en-US" sz="6000" dirty="0">
-                <a:solidFill>
-                  <a:srgbClr val="707070"/>
-                </a:solidFill>
-                <a:latin typeface="Pragmatica" panose="020B0403040502020204" pitchFamily="34" charset="0"/>
-              </a:rPr>
-              <a:t>  </a:t>
-            </a:r>
-          </a:p>
-          <a:p>
-            <a:pPr marL="685800" indent="-685800">
-              <a:buClr>
-                <a:srgbClr val="CF3338"/>
-              </a:buClr>
-              <a:buFont typeface="Arial" panose="020B0604020202020204" pitchFamily="34" charset="0"/>
-              <a:buChar char="•"/>
-            </a:pPr>
-            <a:r>
-              <a:rPr lang="en-US" sz="6000" dirty="0">
-                <a:solidFill>
-                  <a:srgbClr val="707070"/>
-                </a:solidFill>
-                <a:latin typeface="Pragmatica" panose="020B0403040502020204" pitchFamily="34" charset="0"/>
-              </a:rPr>
-              <a:t>Newsletter: Subscribe at blog</a:t>
-            </a:r>
-          </a:p>
-          <a:p>
-            <a:pPr marL="685800" indent="-685800">
-              <a:buClr>
-                <a:srgbClr val="CF3338"/>
-              </a:buClr>
-              <a:buFont typeface="Arial" panose="020B0604020202020204" pitchFamily="34" charset="0"/>
-              <a:buChar char="•"/>
-            </a:pPr>
-            <a:r>
-              <a:rPr lang="en-US" sz="6000" dirty="0">
-                <a:solidFill>
-                  <a:srgbClr val="CF3338"/>
-                </a:solidFill>
-                <a:latin typeface="Pragmatica" panose="020B0403040502020204" pitchFamily="34" charset="0"/>
-                <a:hlinkClick r:id="rId3">
-                  <a:extLst>
-                    <a:ext uri="{A12FA001-AC4F-418D-AE19-62706E023703}">
-                      <ahyp:hlinkClr xmlns:ahyp="http://schemas.microsoft.com/office/drawing/2018/hyperlinkcolor" val="tx"/>
-                    </a:ext>
-                  </a:extLst>
-                </a:hlinkClick>
-              </a:rPr>
-              <a:t>LinkedIn</a:t>
-            </a:r>
-            <a:r>
-              <a:rPr lang="en-US" sz="6000" dirty="0">
-                <a:solidFill>
-                  <a:srgbClr val="707070"/>
-                </a:solidFill>
-                <a:latin typeface="Pragmatica" panose="020B0403040502020204" pitchFamily="34" charset="0"/>
-              </a:rPr>
-              <a:t>: Follow for daily(</a:t>
-            </a:r>
-            <a:r>
-              <a:rPr lang="en-US" sz="6000" dirty="0" err="1">
-                <a:solidFill>
-                  <a:srgbClr val="707070"/>
-                </a:solidFill>
-                <a:latin typeface="Pragmatica" panose="020B0403040502020204" pitchFamily="34" charset="0"/>
-              </a:rPr>
-              <a:t>ish</a:t>
-            </a:r>
-            <a:r>
-              <a:rPr lang="en-US" sz="6000" dirty="0">
-                <a:solidFill>
-                  <a:srgbClr val="707070"/>
-                </a:solidFill>
-                <a:latin typeface="Pragmatica" panose="020B0403040502020204" pitchFamily="34" charset="0"/>
-              </a:rPr>
-              <a:t>) free resources</a:t>
-            </a:r>
-          </a:p>
-        </p:txBody>
-      </p:sp>
-      <p:pic>
-        <p:nvPicPr>
-          <p:cNvPr id="15" name="Picture 14" descr="A close up of a sign&#10;&#10;Description automatically generated">
-            <a:extLst>
-              <a:ext uri="{FF2B5EF4-FFF2-40B4-BE49-F238E27FC236}">
-                <a16:creationId xmlns:a16="http://schemas.microsoft.com/office/drawing/2014/main" id="{0FC37808-A34B-5C68-C9BC-F79DB06A951B}"/>
-              </a:ext>
-            </a:extLst>
-          </p:cNvPr>
-          <p:cNvPicPr>
-            <a:picLocks noChangeAspect="1"/>
-          </p:cNvPicPr>
-          <p:nvPr/>
-        </p:nvPicPr>
-        <p:blipFill>
-          <a:blip r:embed="rId4">
-            <a:extLst>
-              <a:ext uri="{28A0092B-C50C-407E-A947-70E740481C1C}">
-                <a14:useLocalDpi xmlns:a14="http://schemas.microsoft.com/office/drawing/2010/main" val="0"/>
-              </a:ext>
-            </a:extLst>
-          </a:blip>
-          <a:stretch>
-            <a:fillRect/>
-          </a:stretch>
-        </p:blipFill>
-        <p:spPr>
-          <a:xfrm>
-            <a:off x="16341036" y="8058429"/>
-            <a:ext cx="1942857" cy="2228571"/>
-          </a:xfrm>
-          <a:prstGeom prst="rect">
-            <a:avLst/>
-          </a:prstGeom>
-        </p:spPr>
-      </p:pic>
-    </p:spTree>
-    <p:extLst>
-      <p:ext uri="{BB962C8B-B14F-4D97-AF65-F5344CB8AC3E}">
-        <p14:creationId xmlns:p14="http://schemas.microsoft.com/office/powerpoint/2010/main" val="2825019953"/>
-      </p:ext>
-    </p:extLst>
-  </p:cSld>
-  <p:clrMapOvr>
-    <a:masterClrMapping/>
-  </p:clrMapOvr>
-</p:sld>
-</file>
-
-<file path=ppt/slides/slide13.xml><?xml version="1.0" encoding="utf-8"?>
-<p:sld xmlns:a="http://schemas.openxmlformats.org/drawingml/2006/main" xmlns:r="http://schemas.openxmlformats.org/officeDocument/2006/relationships" xmlns:p="http://schemas.openxmlformats.org/presentationml/2006/main">
-  <p:cSld>
-    <p:spTree>
-      <p:nvGrpSpPr>
-        <p:cNvPr id="1" name="">
-          <a:extLst>
-            <a:ext uri="{FF2B5EF4-FFF2-40B4-BE49-F238E27FC236}">
-              <a16:creationId xmlns:a16="http://schemas.microsoft.com/office/drawing/2014/main" id="{F5AEC324-F127-034F-789B-5A7053A9EA42}"/>
-            </a:ext>
-          </a:extLst>
-        </p:cNvPr>
-        <p:cNvGrpSpPr/>
-        <p:nvPr/>
-      </p:nvGrpSpPr>
-      <p:grpSpPr>
-        <a:xfrm>
-          <a:off x="0" y="0"/>
-          <a:ext cx="0" cy="0"/>
-          <a:chOff x="0" y="0"/>
-          <a:chExt cx="0" cy="0"/>
-        </a:xfrm>
-      </p:grpSpPr>
-      <p:sp>
-        <p:nvSpPr>
-          <p:cNvPr id="11" name="TextBox 10">
-            <a:extLst>
-              <a:ext uri="{FF2B5EF4-FFF2-40B4-BE49-F238E27FC236}">
-                <a16:creationId xmlns:a16="http://schemas.microsoft.com/office/drawing/2014/main" id="{6CFC538D-387E-3B37-334C-F0DA73611E0F}"/>
-              </a:ext>
-            </a:extLst>
-          </p:cNvPr>
-          <p:cNvSpPr txBox="1"/>
-          <p:nvPr/>
-        </p:nvSpPr>
-        <p:spPr>
-          <a:xfrm>
-            <a:off x="520861" y="170082"/>
-            <a:ext cx="11979797" cy="2308324"/>
-          </a:xfrm>
-          <a:prstGeom prst="rect">
-            <a:avLst/>
-          </a:prstGeom>
-          <a:noFill/>
-        </p:spPr>
-        <p:txBody>
-          <a:bodyPr wrap="square" rtlCol="0">
-            <a:spAutoFit/>
-          </a:bodyPr>
-          <a:lstStyle/>
-          <a:p>
-            <a:r>
-              <a:rPr lang="en-US" sz="7200" dirty="0">
-                <a:latin typeface="Aliens &amp; cows" panose="00000500000000000000" pitchFamily="2" charset="0"/>
-              </a:rPr>
-              <a:t>Recurring insights with my membership!</a:t>
-            </a:r>
-          </a:p>
-        </p:txBody>
-      </p:sp>
-      <p:sp>
-        <p:nvSpPr>
-          <p:cNvPr id="3" name="TextBox 2">
-            <a:extLst>
-              <a:ext uri="{FF2B5EF4-FFF2-40B4-BE49-F238E27FC236}">
-                <a16:creationId xmlns:a16="http://schemas.microsoft.com/office/drawing/2014/main" id="{0938EDF8-7875-694D-9006-A4377D8A6033}"/>
-              </a:ext>
-            </a:extLst>
-          </p:cNvPr>
-          <p:cNvSpPr txBox="1"/>
-          <p:nvPr/>
-        </p:nvSpPr>
-        <p:spPr>
-          <a:xfrm>
-            <a:off x="520861" y="3191948"/>
-            <a:ext cx="7480139" cy="7478970"/>
-          </a:xfrm>
-          <a:prstGeom prst="rect">
-            <a:avLst/>
-          </a:prstGeom>
-          <a:noFill/>
-        </p:spPr>
-        <p:txBody>
-          <a:bodyPr wrap="square" rtlCol="0">
-            <a:spAutoFit/>
-          </a:bodyPr>
-          <a:lstStyle/>
-          <a:p>
-            <a:pPr marL="685800" indent="-685800">
-              <a:buClr>
-                <a:srgbClr val="CF3338"/>
-              </a:buClr>
-              <a:buFont typeface="Arial" panose="020B0604020202020204" pitchFamily="34" charset="0"/>
-              <a:buChar char="•"/>
-            </a:pPr>
-            <a:r>
-              <a:rPr lang="en-US" sz="6000" dirty="0">
-                <a:solidFill>
-                  <a:srgbClr val="CF3338"/>
-                </a:solidFill>
-                <a:latin typeface="Pragmatica" panose="020B0403040502020204" pitchFamily="34" charset="0"/>
-                <a:hlinkClick r:id="rId2">
-                  <a:extLst>
-                    <a:ext uri="{A12FA001-AC4F-418D-AE19-62706E023703}">
-                      <ahyp:hlinkClr xmlns:ahyp="http://schemas.microsoft.com/office/drawing/2018/hyperlinkcolor" val="tx"/>
-                    </a:ext>
-                  </a:extLst>
-                </a:hlinkClick>
-              </a:rPr>
-              <a:t>stringfestdata.gumroad.com/l/</a:t>
-            </a:r>
-            <a:r>
-              <a:rPr lang="en-US" sz="6000" dirty="0" err="1">
-                <a:solidFill>
-                  <a:srgbClr val="CF3338"/>
-                </a:solidFill>
-                <a:latin typeface="Pragmatica" panose="020B0403040502020204" pitchFamily="34" charset="0"/>
-                <a:hlinkClick r:id="rId2">
-                  <a:extLst>
-                    <a:ext uri="{A12FA001-AC4F-418D-AE19-62706E023703}">
-                      <ahyp:hlinkClr xmlns:ahyp="http://schemas.microsoft.com/office/drawing/2018/hyperlinkcolor" val="tx"/>
-                    </a:ext>
-                  </a:extLst>
-                </a:hlinkClick>
-              </a:rPr>
-              <a:t>mxlais</a:t>
-            </a:r>
-            <a:endParaRPr lang="en-US" sz="6000" dirty="0">
-              <a:solidFill>
-                <a:srgbClr val="CF3338"/>
-              </a:solidFill>
-              <a:latin typeface="Pragmatica" panose="020B0403040502020204" pitchFamily="34" charset="0"/>
-            </a:endParaRPr>
-          </a:p>
-          <a:p>
-            <a:pPr marL="685800" indent="-685800">
-              <a:buClr>
-                <a:srgbClr val="CF3338"/>
-              </a:buClr>
-              <a:buFont typeface="Arial" panose="020B0604020202020204" pitchFamily="34" charset="0"/>
-              <a:buChar char="•"/>
-            </a:pPr>
-            <a:r>
-              <a:rPr lang="en-US" sz="6000" dirty="0">
-                <a:solidFill>
-                  <a:srgbClr val="CF3338"/>
-                </a:solidFill>
-                <a:latin typeface="Pragmatica" panose="020B0403040502020204" pitchFamily="34" charset="0"/>
-              </a:rPr>
-              <a:t>Monthly updates on what actually matters in AI-powered Excel &amp; friends</a:t>
-            </a:r>
-          </a:p>
-          <a:p>
-            <a:pPr marL="685800" indent="-685800">
-              <a:buClr>
-                <a:srgbClr val="CF3338"/>
-              </a:buClr>
-              <a:buFont typeface="Arial" panose="020B0604020202020204" pitchFamily="34" charset="0"/>
-              <a:buChar char="•"/>
-            </a:pPr>
-            <a:endParaRPr lang="en-US" sz="6000" dirty="0">
-              <a:solidFill>
-                <a:srgbClr val="CF3338"/>
-              </a:solidFill>
-              <a:latin typeface="Pragmatica" panose="020B0403040502020204" pitchFamily="34" charset="0"/>
-            </a:endParaRPr>
-          </a:p>
-        </p:txBody>
-      </p:sp>
-      <p:pic>
-        <p:nvPicPr>
-          <p:cNvPr id="15" name="Picture 14" descr="A close up of a sign&#10;&#10;Description automatically generated">
-            <a:extLst>
-              <a:ext uri="{FF2B5EF4-FFF2-40B4-BE49-F238E27FC236}">
-                <a16:creationId xmlns:a16="http://schemas.microsoft.com/office/drawing/2014/main" id="{DC2C381A-C4F4-6B52-5F4D-223BA763C7BD}"/>
-              </a:ext>
-            </a:extLst>
-          </p:cNvPr>
-          <p:cNvPicPr>
-            <a:picLocks noChangeAspect="1"/>
-          </p:cNvPicPr>
-          <p:nvPr/>
-        </p:nvPicPr>
-        <p:blipFill>
-          <a:blip r:embed="rId3">
-            <a:extLst>
-              <a:ext uri="{28A0092B-C50C-407E-A947-70E740481C1C}">
-                <a14:useLocalDpi xmlns:a14="http://schemas.microsoft.com/office/drawing/2010/main" val="0"/>
-              </a:ext>
-            </a:extLst>
-          </a:blip>
-          <a:stretch>
-            <a:fillRect/>
-          </a:stretch>
-        </p:blipFill>
-        <p:spPr>
-          <a:xfrm>
-            <a:off x="16341036" y="8058429"/>
-            <a:ext cx="1942857" cy="2228571"/>
-          </a:xfrm>
-          <a:prstGeom prst="rect">
-            <a:avLst/>
-          </a:prstGeom>
-        </p:spPr>
-      </p:pic>
-      <p:pic>
-        <p:nvPicPr>
-          <p:cNvPr id="2" name="Picture 1">
-            <a:extLst>
-              <a:ext uri="{FF2B5EF4-FFF2-40B4-BE49-F238E27FC236}">
-                <a16:creationId xmlns:a16="http://schemas.microsoft.com/office/drawing/2014/main" id="{681BD4E7-538A-7B3D-9DA6-06DA1F97B39B}"/>
-              </a:ext>
-            </a:extLst>
-          </p:cNvPr>
-          <p:cNvPicPr>
-            <a:picLocks noChangeAspect="1"/>
-          </p:cNvPicPr>
-          <p:nvPr/>
-        </p:nvPicPr>
-        <p:blipFill>
-          <a:blip r:embed="rId4"/>
-          <a:stretch>
-            <a:fillRect/>
-          </a:stretch>
-        </p:blipFill>
-        <p:spPr>
-          <a:xfrm>
-            <a:off x="8576733" y="3170781"/>
-            <a:ext cx="8963025" cy="5981197"/>
-          </a:xfrm>
-          <a:prstGeom prst="rect">
-            <a:avLst/>
-          </a:prstGeom>
-        </p:spPr>
-      </p:pic>
-    </p:spTree>
-    <p:extLst>
-      <p:ext uri="{BB962C8B-B14F-4D97-AF65-F5344CB8AC3E}">
-        <p14:creationId xmlns:p14="http://schemas.microsoft.com/office/powerpoint/2010/main" val="3632322916"/>
-      </p:ext>
-    </p:extLst>
-  </p:cSld>
-  <p:clrMapOvr>
-    <a:masterClrMapping/>
-  </p:clrMapOvr>
+  <p:timing>
+    <p:tnLst>
+      <p:par>
+        <p:cTn id="1" dur="indefinite" restart="never" nodeType="tmRoot">
+          <p:childTnLst>
+            <p:seq concurrent="1" nextAc="seek">
+              <p:cTn id="2" dur="indefinite" nodeType="mainSeq">
+                <p:childTnLst>
+                  <p:par>
+                    <p:cTn id="3" fill="hold">
+                      <p:stCondLst>
+                        <p:cond delay="indefinite"/>
+                      </p:stCondLst>
+                      <p:childTnLst>
+                        <p:par>
+                          <p:cTn id="4" fill="hold">
+                            <p:stCondLst>
+                              <p:cond delay="0"/>
+                            </p:stCondLst>
+                            <p:childTnLst>
+                              <p:par>
+                                <p:cTn id="5" presetID="1" presetClass="entr" presetSubtype="0" fill="hold" grpId="0" nodeType="clickEffect">
+                                  <p:stCondLst>
+                                    <p:cond delay="0"/>
+                                  </p:stCondLst>
+                                  <p:childTnLst>
+                                    <p:set>
+                                      <p:cBhvr>
+                                        <p:cTn id="6" dur="1" fill="hold">
+                                          <p:stCondLst>
+                                            <p:cond delay="0"/>
+                                          </p:stCondLst>
+                                        </p:cTn>
+                                        <p:tgtEl>
+                                          <p:spTgt spid="3">
+                                            <p:txEl>
+                                              <p:pRg st="0" end="0"/>
+                                            </p:txEl>
+                                          </p:spTgt>
+                                        </p:tgtEl>
+                                        <p:attrNameLst>
+                                          <p:attrName>style.visibility</p:attrName>
+                                        </p:attrNameLst>
+                                      </p:cBhvr>
+                                      <p:to>
+                                        <p:strVal val="visible"/>
+                                      </p:to>
+                                    </p:set>
+                                  </p:childTnLst>
+                                </p:cTn>
+                              </p:par>
+                            </p:childTnLst>
+                          </p:cTn>
+                        </p:par>
+                      </p:childTnLst>
+                    </p:cTn>
+                  </p:par>
+                  <p:par>
+                    <p:cTn id="7" fill="hold">
+                      <p:stCondLst>
+                        <p:cond delay="indefinite"/>
+                      </p:stCondLst>
+                      <p:childTnLst>
+                        <p:par>
+                          <p:cTn id="8" fill="hold">
+                            <p:stCondLst>
+                              <p:cond delay="0"/>
+                            </p:stCondLst>
+                            <p:childTnLst>
+                              <p:par>
+                                <p:cTn id="9" presetID="1" presetClass="entr" presetSubtype="0" fill="hold" grpId="0" nodeType="clickEffect">
+                                  <p:stCondLst>
+                                    <p:cond delay="0"/>
+                                  </p:stCondLst>
+                                  <p:childTnLst>
+                                    <p:set>
+                                      <p:cBhvr>
+                                        <p:cTn id="10" dur="1" fill="hold">
+                                          <p:stCondLst>
+                                            <p:cond delay="0"/>
+                                          </p:stCondLst>
+                                        </p:cTn>
+                                        <p:tgtEl>
+                                          <p:spTgt spid="3">
+                                            <p:txEl>
+                                              <p:pRg st="1" end="1"/>
+                                            </p:txEl>
+                                          </p:spTgt>
+                                        </p:tgtEl>
+                                        <p:attrNameLst>
+                                          <p:attrName>style.visibility</p:attrName>
+                                        </p:attrNameLst>
+                                      </p:cBhvr>
+                                      <p:to>
+                                        <p:strVal val="visible"/>
+                                      </p:to>
+                                    </p:set>
+                                  </p:childTnLst>
+                                </p:cTn>
+                              </p:par>
+                            </p:childTnLst>
+                          </p:cTn>
+                        </p:par>
+                      </p:childTnLst>
+                    </p:cTn>
+                  </p:par>
+                  <p:par>
+                    <p:cTn id="11" fill="hold">
+                      <p:stCondLst>
+                        <p:cond delay="indefinite"/>
+                      </p:stCondLst>
+                      <p:childTnLst>
+                        <p:par>
+                          <p:cTn id="12" fill="hold">
+                            <p:stCondLst>
+                              <p:cond delay="0"/>
+                            </p:stCondLst>
+                            <p:childTnLst>
+                              <p:par>
+                                <p:cTn id="13" presetID="1" presetClass="entr" presetSubtype="0" fill="hold" grpId="0" nodeType="clickEffect">
+                                  <p:stCondLst>
+                                    <p:cond delay="0"/>
+                                  </p:stCondLst>
+                                  <p:childTnLst>
+                                    <p:set>
+                                      <p:cBhvr>
+                                        <p:cTn id="14" dur="1" fill="hold">
+                                          <p:stCondLst>
+                                            <p:cond delay="0"/>
+                                          </p:stCondLst>
+                                        </p:cTn>
+                                        <p:tgtEl>
+                                          <p:spTgt spid="3">
+                                            <p:txEl>
+                                              <p:pRg st="2" end="2"/>
+                                            </p:txEl>
+                                          </p:spTgt>
+                                        </p:tgtEl>
+                                        <p:attrNameLst>
+                                          <p:attrName>style.visibility</p:attrName>
+                                        </p:attrNameLst>
+                                      </p:cBhvr>
+                                      <p:to>
+                                        <p:strVal val="visible"/>
+                                      </p:to>
+                                    </p:set>
+                                  </p:childTnLst>
+                                </p:cTn>
+                              </p:par>
+                            </p:childTnLst>
+                          </p:cTn>
+                        </p:par>
+                      </p:childTnLst>
+                    </p:cTn>
+                  </p:par>
+                  <p:par>
+                    <p:cTn id="15" fill="hold">
+                      <p:stCondLst>
+                        <p:cond delay="indefinite"/>
+                      </p:stCondLst>
+                      <p:childTnLst>
+                        <p:par>
+                          <p:cTn id="16" fill="hold">
+                            <p:stCondLst>
+                              <p:cond delay="0"/>
+                            </p:stCondLst>
+                            <p:childTnLst>
+                              <p:par>
+                                <p:cTn id="17" presetID="1" presetClass="entr" presetSubtype="0" fill="hold" grpId="0" nodeType="clickEffect">
+                                  <p:stCondLst>
+                                    <p:cond delay="0"/>
+                                  </p:stCondLst>
+                                  <p:childTnLst>
+                                    <p:set>
+                                      <p:cBhvr>
+                                        <p:cTn id="18" dur="1" fill="hold">
+                                          <p:stCondLst>
+                                            <p:cond delay="0"/>
+                                          </p:stCondLst>
+                                        </p:cTn>
+                                        <p:tgtEl>
+                                          <p:spTgt spid="3">
+                                            <p:txEl>
+                                              <p:pRg st="3" end="3"/>
+                                            </p:txEl>
+                                          </p:spTgt>
+                                        </p:tgtEl>
+                                        <p:attrNameLst>
+                                          <p:attrName>style.visibility</p:attrName>
+                                        </p:attrNameLst>
+                                      </p:cBhvr>
+                                      <p:to>
+                                        <p:strVal val="visible"/>
+                                      </p:to>
+                                    </p:set>
+                                  </p:childTnLst>
+                                </p:cTn>
+                              </p:par>
+                            </p:childTnLst>
+                          </p:cTn>
+                        </p:par>
+                      </p:childTnLst>
+                    </p:cTn>
+                  </p:par>
+                  <p:par>
+                    <p:cTn id="19" fill="hold">
+                      <p:stCondLst>
+                        <p:cond delay="indefinite"/>
+                      </p:stCondLst>
+                      <p:childTnLst>
+                        <p:par>
+                          <p:cTn id="20" fill="hold">
+                            <p:stCondLst>
+                              <p:cond delay="0"/>
+                            </p:stCondLst>
+                            <p:childTnLst>
+                              <p:par>
+                                <p:cTn id="21" presetID="1" presetClass="entr" presetSubtype="0" fill="hold" grpId="0" nodeType="clickEffect">
+                                  <p:stCondLst>
+                                    <p:cond delay="0"/>
+                                  </p:stCondLst>
+                                  <p:childTnLst>
+                                    <p:set>
+                                      <p:cBhvr>
+                                        <p:cTn id="22" dur="1" fill="hold">
+                                          <p:stCondLst>
+                                            <p:cond delay="0"/>
+                                          </p:stCondLst>
+                                        </p:cTn>
+                                        <p:tgtEl>
+                                          <p:spTgt spid="3">
+                                            <p:txEl>
+                                              <p:pRg st="4" end="4"/>
+                                            </p:txEl>
+                                          </p:spTgt>
+                                        </p:tgtEl>
+                                        <p:attrNameLst>
+                                          <p:attrName>style.visibility</p:attrName>
+                                        </p:attrNameLst>
+                                      </p:cBhvr>
+                                      <p:to>
+                                        <p:strVal val="visible"/>
+                                      </p:to>
+                                    </p:set>
+                                  </p:childTnLst>
+                                </p:cTn>
+                              </p:par>
+                            </p:childTnLst>
+                          </p:cTn>
+                        </p:par>
+                      </p:childTnLst>
+                    </p:cTn>
+                  </p:par>
+                </p:childTnLst>
+              </p:cTn>
+              <p:prevCondLst>
+                <p:cond evt="onPrev" delay="0">
+                  <p:tgtEl>
+                    <p:sldTgt/>
+                  </p:tgtEl>
+                </p:cond>
+              </p:prevCondLst>
+              <p:nextCondLst>
+                <p:cond evt="onNext" delay="0">
+                  <p:tgtEl>
+                    <p:sldTgt/>
+                  </p:tgtEl>
+                </p:cond>
+              </p:nextCondLst>
+            </p:seq>
+          </p:childTnLst>
+        </p:cTn>
+      </p:par>
+    </p:tnLst>
+    <p:bldLst>
+      <p:bldP spid="3" grpId="0" build="p"/>
+    </p:bldLst>
+  </p:timing>
 </p:sld>
 </file>
 
@@ -8449,7 +9028,7 @@
                 </a:solidFill>
                 <a:latin typeface="Pragmatica" panose="020B0403040502020204" pitchFamily="34" charset="0"/>
               </a:rPr>
-              <a:t>Available in the event downloads folder</a:t>
+              <a:t>Available in the downloads folder</a:t>
             </a:r>
           </a:p>
         </p:txBody>
@@ -9078,7 +9657,7 @@
         <p:spPr>
           <a:xfrm>
             <a:off x="781292" y="590309"/>
-            <a:ext cx="15486926" cy="1615827"/>
+            <a:ext cx="15486926" cy="1446550"/>
           </a:xfrm>
           <a:prstGeom prst="rect">
             <a:avLst/>
@@ -9092,13 +9671,22 @@
           <a:lstStyle/>
           <a:p>
             <a:r>
-              <a:rPr lang="en-US" sz="9900" b="1" dirty="0">
+              <a:rPr lang="en-US" sz="4400" b="1" dirty="0">
                 <a:solidFill>
                   <a:schemeClr val="bg1"/>
                 </a:solidFill>
-                <a:latin typeface="Normafixed Tryout" panose="00000409000000000000" pitchFamily="49" charset="0"/>
               </a:rPr>
-              <a:t>Welcome!</a:t>
+              <a:t>I help Excel users move from fragile spreadsheets</a:t>
+            </a:r>
+          </a:p>
+          <a:p>
+            <a:r>
+              <a:rPr lang="en-US" sz="4400" b="1" dirty="0">
+                <a:solidFill>
+                  <a:schemeClr val="bg1"/>
+                </a:solidFill>
+              </a:rPr>
+              <a:t>to confident, scalable analysis.</a:t>
             </a:r>
           </a:p>
         </p:txBody>
@@ -9507,7 +10095,7 @@
                 </a:solidFill>
                 <a:latin typeface="Pragmatica" panose="020B0403040502020204" pitchFamily="34" charset="0"/>
               </a:rPr>
-              <a:t>Referral program &amp; bonus resources</a:t>
+              <a:t>Bonus resources</a:t>
             </a:r>
           </a:p>
         </p:txBody>

--- a/modern-excel-demo-day.pptx
+++ b/modern-excel-demo-day.pptx
@@ -913,7 +913,7 @@
     <dgm:pt modelId="{68798DD1-6FC4-4C34-9F3F-53BBEB998853}" type="doc">
       <dgm:prSet loTypeId="urn:microsoft.com/office/officeart/2005/8/layout/chevron2" loCatId="process" qsTypeId="urn:microsoft.com/office/officeart/2005/8/quickstyle/simple1" qsCatId="simple" csTypeId="urn:microsoft.com/office/officeart/2005/8/colors/accent1_2" csCatId="accent1" phldr="1"/>
       <dgm:spPr/>
-      <dgm:t>
+      <dgm:t xml:space="preserve">
         <a:bodyPr/>
         <a:lstStyle/>
         <a:p>
@@ -928,7 +928,7 @@
           <a:srgbClr val="C00000"/>
         </a:solidFill>
       </dgm:spPr>
-      <dgm:t>
+      <dgm:t xml:space="preserve">
         <a:bodyPr/>
         <a:lstStyle/>
         <a:p>
@@ -942,7 +942,7 @@
     <dgm:pt modelId="{FF3D7B0C-E2C4-49B8-8C4B-AF120BF1E2B9}" type="parTrans" cxnId="{6C0172DF-D88B-41D4-B3F5-CA15E159222B}">
       <dgm:prSet/>
       <dgm:spPr/>
-      <dgm:t>
+      <dgm:t xml:space="preserve">
         <a:bodyPr/>
         <a:lstStyle/>
         <a:p>
@@ -953,7 +953,7 @@
     <dgm:pt modelId="{969895C4-5161-439F-BA5B-C7930ADA9517}" type="sibTrans" cxnId="{6C0172DF-D88B-41D4-B3F5-CA15E159222B}">
       <dgm:prSet/>
       <dgm:spPr/>
-      <dgm:t>
+      <dgm:t xml:space="preserve">
         <a:bodyPr/>
         <a:lstStyle/>
         <a:p>
@@ -972,7 +972,7 @@
           </a:solidFill>
         </a:ln>
       </dgm:spPr>
-      <dgm:t>
+      <dgm:t xml:space="preserve">
         <a:bodyPr/>
         <a:lstStyle/>
         <a:p>
@@ -986,7 +986,7 @@
     <dgm:pt modelId="{C97A6C3A-9B27-45E4-8D96-A0B3EE805D38}" type="parTrans" cxnId="{6C6CBB06-B18A-42AC-8E9C-1FECB4298C8E}">
       <dgm:prSet/>
       <dgm:spPr/>
-      <dgm:t>
+      <dgm:t xml:space="preserve">
         <a:bodyPr/>
         <a:lstStyle/>
         <a:p>
@@ -997,7 +997,7 @@
     <dgm:pt modelId="{95B33339-D74D-43E7-BBDD-70E0EB607FD8}" type="sibTrans" cxnId="{6C6CBB06-B18A-42AC-8E9C-1FECB4298C8E}">
       <dgm:prSet/>
       <dgm:spPr/>
-      <dgm:t>
+      <dgm:t xml:space="preserve">
         <a:bodyPr/>
         <a:lstStyle/>
         <a:p>
@@ -1016,7 +1016,7 @@
           </a:solidFill>
         </a:ln>
       </dgm:spPr>
-      <dgm:t>
+      <dgm:t xml:space="preserve">
         <a:bodyPr/>
         <a:lstStyle/>
         <a:p>
@@ -1030,7 +1030,7 @@
     <dgm:pt modelId="{88E2D7DD-A20A-4D82-B7BA-495E3CA5520E}" type="parTrans" cxnId="{08744D63-46D0-44D2-900A-8851AAD8CEA3}">
       <dgm:prSet/>
       <dgm:spPr/>
-      <dgm:t>
+      <dgm:t xml:space="preserve">
         <a:bodyPr/>
         <a:lstStyle/>
         <a:p>
@@ -1041,7 +1041,7 @@
     <dgm:pt modelId="{EFC160FF-009E-419D-9011-2FCCED5BFCAE}" type="sibTrans" cxnId="{08744D63-46D0-44D2-900A-8851AAD8CEA3}">
       <dgm:prSet/>
       <dgm:spPr/>
-      <dgm:t>
+      <dgm:t xml:space="preserve">
         <a:bodyPr/>
         <a:lstStyle/>
         <a:p>
@@ -1060,7 +1060,7 @@
           </a:solidFill>
         </a:ln>
       </dgm:spPr>
-      <dgm:t>
+      <dgm:t xml:space="preserve">
         <a:bodyPr/>
         <a:lstStyle/>
         <a:p>
@@ -1074,7 +1074,7 @@
     <dgm:pt modelId="{BDE34EB0-9E1B-4FF4-9FC7-70742D76E4E6}" type="parTrans" cxnId="{9453C970-A133-42A1-BB1A-7672CEFA0687}">
       <dgm:prSet/>
       <dgm:spPr/>
-      <dgm:t>
+      <dgm:t xml:space="preserve">
         <a:bodyPr/>
         <a:lstStyle/>
         <a:p>
@@ -1085,7 +1085,7 @@
     <dgm:pt modelId="{45E94802-E21A-4AC8-ACCB-FA38B41DCB9F}" type="sibTrans" cxnId="{9453C970-A133-42A1-BB1A-7672CEFA0687}">
       <dgm:prSet/>
       <dgm:spPr/>
-      <dgm:t>
+      <dgm:t xml:space="preserve">
         <a:bodyPr/>
         <a:lstStyle/>
         <a:p>
@@ -1100,7 +1100,7 @@
           <a:srgbClr val="C00000"/>
         </a:solidFill>
       </dgm:spPr>
-      <dgm:t>
+      <dgm:t xml:space="preserve">
         <a:bodyPr/>
         <a:lstStyle/>
         <a:p>
@@ -1114,7 +1114,7 @@
     <dgm:pt modelId="{2EE0B6F5-6A8E-418F-9567-1907B2738A34}" type="parTrans" cxnId="{BC96F6EE-A452-4FD1-957C-3C61D63DF19A}">
       <dgm:prSet/>
       <dgm:spPr/>
-      <dgm:t>
+      <dgm:t xml:space="preserve">
         <a:bodyPr/>
         <a:lstStyle/>
         <a:p>
@@ -1125,7 +1125,7 @@
     <dgm:pt modelId="{E09FC7D4-5B56-4C5F-893B-848769202938}" type="sibTrans" cxnId="{BC96F6EE-A452-4FD1-957C-3C61D63DF19A}">
       <dgm:prSet/>
       <dgm:spPr/>
-      <dgm:t>
+      <dgm:t xml:space="preserve">
         <a:bodyPr/>
         <a:lstStyle/>
         <a:p>
@@ -1144,7 +1144,7 @@
           </a:solidFill>
         </a:ln>
       </dgm:spPr>
-      <dgm:t>
+      <dgm:t xml:space="preserve">
         <a:bodyPr/>
         <a:lstStyle/>
         <a:p>
@@ -1158,7 +1158,7 @@
     <dgm:pt modelId="{C7A141B3-2B9C-4F4D-9D07-5F119890BE56}" type="parTrans" cxnId="{E39F6071-D189-4302-81C2-C8D5AD0A841D}">
       <dgm:prSet/>
       <dgm:spPr/>
-      <dgm:t>
+      <dgm:t xml:space="preserve">
         <a:bodyPr/>
         <a:lstStyle/>
         <a:p>
@@ -1169,7 +1169,7 @@
     <dgm:pt modelId="{BF1D4A6B-4EBA-4D46-93B3-07C66BF920A8}" type="sibTrans" cxnId="{E39F6071-D189-4302-81C2-C8D5AD0A841D}">
       <dgm:prSet/>
       <dgm:spPr/>
-      <dgm:t>
+      <dgm:t xml:space="preserve">
         <a:bodyPr/>
         <a:lstStyle/>
         <a:p>
@@ -1188,7 +1188,7 @@
           </a:solidFill>
         </a:ln>
       </dgm:spPr>
-      <dgm:t>
+      <dgm:t xml:space="preserve">
         <a:bodyPr/>
         <a:lstStyle/>
         <a:p>
@@ -1202,7 +1202,7 @@
     <dgm:pt modelId="{DF6760EA-CD03-4B40-8B21-BE7EBE5C8B51}" type="parTrans" cxnId="{D544EC0C-557D-4137-BBE5-D7047405AD61}">
       <dgm:prSet/>
       <dgm:spPr/>
-      <dgm:t>
+      <dgm:t xml:space="preserve">
         <a:bodyPr/>
         <a:lstStyle/>
         <a:p>
@@ -1213,7 +1213,7 @@
     <dgm:pt modelId="{56F627CE-8FDB-492D-9146-C96F55B7E1C0}" type="sibTrans" cxnId="{D544EC0C-557D-4137-BBE5-D7047405AD61}">
       <dgm:prSet/>
       <dgm:spPr/>
-      <dgm:t>
+      <dgm:t xml:space="preserve">
         <a:bodyPr/>
         <a:lstStyle/>
         <a:p>
@@ -1232,7 +1232,7 @@
           </a:solidFill>
         </a:ln>
       </dgm:spPr>
-      <dgm:t>
+      <dgm:t xml:space="preserve">
         <a:bodyPr/>
         <a:lstStyle/>
         <a:p>
@@ -1246,7 +1246,7 @@
     <dgm:pt modelId="{23C95D64-ACDF-4793-AF7E-ADB56BE2841D}" type="parTrans" cxnId="{1C3620EC-CE2A-437B-813B-D62505EEF778}">
       <dgm:prSet/>
       <dgm:spPr/>
-      <dgm:t>
+      <dgm:t xml:space="preserve">
         <a:bodyPr/>
         <a:lstStyle/>
         <a:p>
@@ -1257,7 +1257,7 @@
     <dgm:pt modelId="{98F84862-E132-4EA1-89ED-AC172F965CF6}" type="sibTrans" cxnId="{1C3620EC-CE2A-437B-813B-D62505EEF778}">
       <dgm:prSet/>
       <dgm:spPr/>
-      <dgm:t>
+      <dgm:t xml:space="preserve">
         <a:bodyPr/>
         <a:lstStyle/>
         <a:p>
@@ -1272,7 +1272,7 @@
           <a:srgbClr val="C00000"/>
         </a:solidFill>
       </dgm:spPr>
-      <dgm:t>
+      <dgm:t xml:space="preserve">
         <a:bodyPr/>
         <a:lstStyle/>
         <a:p>
@@ -1286,7 +1286,7 @@
     <dgm:pt modelId="{85C43083-FDDC-4EB5-8CA2-AF1A2A539AE5}" type="parTrans" cxnId="{F5A0ED73-185C-43A4-B087-39723A0B16D0}">
       <dgm:prSet/>
       <dgm:spPr/>
-      <dgm:t>
+      <dgm:t xml:space="preserve">
         <a:bodyPr/>
         <a:lstStyle/>
         <a:p>
@@ -1297,7 +1297,7 @@
     <dgm:pt modelId="{C9BD2B50-714A-4AF3-9879-8E0D2682421F}" type="sibTrans" cxnId="{F5A0ED73-185C-43A4-B087-39723A0B16D0}">
       <dgm:prSet/>
       <dgm:spPr/>
-      <dgm:t>
+      <dgm:t xml:space="preserve">
         <a:bodyPr/>
         <a:lstStyle/>
         <a:p>
@@ -1316,7 +1316,7 @@
           </a:solidFill>
         </a:ln>
       </dgm:spPr>
-      <dgm:t>
+      <dgm:t xml:space="preserve">
         <a:bodyPr/>
         <a:lstStyle/>
         <a:p>
@@ -1330,7 +1330,7 @@
     <dgm:pt modelId="{58151A2E-80AA-4AD6-A185-C0F5E8DA47AD}" type="parTrans" cxnId="{B62C6E92-AB91-468B-B358-EDF92131A7AF}">
       <dgm:prSet/>
       <dgm:spPr/>
-      <dgm:t>
+      <dgm:t xml:space="preserve">
         <a:bodyPr/>
         <a:lstStyle/>
         <a:p>
@@ -1341,7 +1341,7 @@
     <dgm:pt modelId="{CBE4C6D7-AAFF-485C-A9FE-75A1ADEB00AD}" type="sibTrans" cxnId="{B62C6E92-AB91-468B-B358-EDF92131A7AF}">
       <dgm:prSet/>
       <dgm:spPr/>
-      <dgm:t>
+      <dgm:t xml:space="preserve">
         <a:bodyPr/>
         <a:lstStyle/>
         <a:p>
@@ -1360,7 +1360,7 @@
           </a:solidFill>
         </a:ln>
       </dgm:spPr>
-      <dgm:t>
+      <dgm:t xml:space="preserve">
         <a:bodyPr/>
         <a:lstStyle/>
         <a:p>
@@ -1374,7 +1374,7 @@
     <dgm:pt modelId="{ACD5A1DA-F5CD-48CE-B171-EC32505DF8B8}" type="parTrans" cxnId="{529891CA-70A8-4B23-B19B-BE2328CC8E28}">
       <dgm:prSet/>
       <dgm:spPr/>
-      <dgm:t>
+      <dgm:t xml:space="preserve">
         <a:bodyPr/>
         <a:lstStyle/>
         <a:p>
@@ -1385,7 +1385,7 @@
     <dgm:pt modelId="{6ACADE56-6832-41F1-9403-24B505942BF3}" type="sibTrans" cxnId="{529891CA-70A8-4B23-B19B-BE2328CC8E28}">
       <dgm:prSet/>
       <dgm:spPr/>
-      <dgm:t>
+      <dgm:t xml:space="preserve">
         <a:bodyPr/>
         <a:lstStyle/>
         <a:p>
@@ -1404,13 +1404,13 @@
           </a:solidFill>
         </a:ln>
       </dgm:spPr>
-      <dgm:t>
+      <dgm:t xml:space="preserve">
         <a:bodyPr/>
         <a:lstStyle/>
         <a:p>
           <a:r>
             <a:rPr lang="en-US" dirty="0"/>
-            <a:t>Internal ownership of reliable, </a:t>
+            <a:t xml:space="preserve">Internal ownership of reliable, </a:t>
           </a:r>
           <a:r>
             <a:rPr lang="en-US"/>
@@ -1423,7 +1423,7 @@
     <dgm:pt modelId="{F3950239-A916-4097-A7B6-DDA6653C9CB5}" type="parTrans" cxnId="{862989A2-6D7C-42A4-A92A-2FD429FB0840}">
       <dgm:prSet/>
       <dgm:spPr/>
-      <dgm:t>
+      <dgm:t xml:space="preserve">
         <a:bodyPr/>
         <a:lstStyle/>
         <a:p>
@@ -1434,7 +1434,7 @@
     <dgm:pt modelId="{63E1678F-6B99-4762-B916-5E63C98E7666}" type="sibTrans" cxnId="{862989A2-6D7C-42A4-A92A-2FD429FB0840}">
       <dgm:prSet/>
       <dgm:spPr/>
-      <dgm:t>
+      <dgm:t xml:space="preserve">
         <a:bodyPr/>
         <a:lstStyle/>
         <a:p>
@@ -2122,7 +2122,7 @@
           </a:pPr>
           <a:r>
             <a:rPr lang="en-US" sz="3200" kern="1200" dirty="0"/>
-            <a:t>Internal ownership of reliable, </a:t>
+            <a:t xml:space="preserve">Internal ownership of reliable, </a:t>
           </a:r>
           <a:r>
             <a:rPr lang="en-US" sz="3200" kern="1200"/>
@@ -3863,6 +3863,334 @@
 </p:notes>
 </file>
 
+<file path=ppt/notesSlides/notesSlide10.xml><?xml version="1.0" encoding="utf-8"?>
+<p:notes xmlns:a="http://schemas.openxmlformats.org/drawingml/2006/main" xmlns:r="http://schemas.openxmlformats.org/officeDocument/2006/relationships" xmlns:p="http://schemas.openxmlformats.org/presentationml/2006/main">
+  <p:cSld>
+    <p:spTree>
+      <p:nvGrpSpPr>
+        <p:cNvPr id="1" name=""/>
+        <p:cNvGrpSpPr/>
+        <p:nvPr/>
+      </p:nvGrpSpPr>
+      <p:grpSpPr>
+        <a:xfrm>
+          <a:off x="0" y="0"/>
+          <a:ext cx="0" cy="0"/>
+          <a:chOff x="0" y="0"/>
+          <a:chExt cx="0" cy="0"/>
+        </a:xfrm>
+      </p:grpSpPr>
+      <p:sp>
+        <p:nvSpPr>
+          <p:cNvPr id="2" name="Slide Image Placeholder 1"/>
+          <p:cNvSpPr>
+            <a:spLocks noGrp="1" noRot="1" noChangeAspect="1"/>
+          </p:cNvSpPr>
+          <p:nvPr>
+            <p:ph type="sldImg"/>
+          </p:nvPr>
+        </p:nvSpPr>
+        <p:spPr/>
+      </p:sp>
+      <p:sp>
+        <p:nvSpPr>
+          <p:cNvPr id="3" name="Notes Placeholder 2"/>
+          <p:cNvSpPr>
+            <a:spLocks noGrp="1"/>
+          </p:cNvSpPr>
+          <p:nvPr>
+            <p:ph type="body" idx="1"/>
+          </p:nvPr>
+        </p:nvSpPr>
+        <p:spPr/>
+        <p:txBody>
+          <a:bodyPr/>
+          <a:lstStyle/>
+          <a:p>
+            <a:r>
+              <a:rPr lang="en-US" dirty="0"/>
+              <a:t>All of this is free and I mean it. I publish regularly, it’s substantive, and it’s not gated behind anything. If free is where you want to stay, I’m genuinely fine with that.</a:t>
+            </a:r>
+          </a:p>
+        </p:txBody>
+      </p:sp>
+      <p:sp>
+        <p:nvSpPr>
+          <p:cNvPr id="4" name="Slide Number Placeholder 3"/>
+          <p:cNvSpPr>
+            <a:spLocks noGrp="1"/>
+          </p:cNvSpPr>
+          <p:nvPr>
+            <p:ph type="sldNum" sz="quarter" idx="5"/>
+          </p:nvPr>
+        </p:nvSpPr>
+        <p:spPr/>
+        <p:txBody>
+          <a:bodyPr/>
+          <a:lstStyle/>
+          <a:p>
+            <a:fld id="{1300335D-9F13-4B80-ADC5-B0EA3E10FF6B}" type="slidenum">
+              <a:rPr lang="en-US" smtClean="0"/>
+              <a:t>10</a:t>
+            </a:fld>
+            <a:endParaRPr lang="en-US"/>
+          </a:p>
+        </p:txBody>
+      </p:sp>
+    </p:spTree>
+  </p:cSld>
+  <p:clrMapOvr>
+    <a:masterClrMapping/>
+  </p:clrMapOvr>
+</p:notes>
+</file>
+
+<file path=ppt/notesSlides/notesSlide11.xml><?xml version="1.0" encoding="utf-8"?>
+<p:notes xmlns:a="http://schemas.openxmlformats.org/drawingml/2006/main" xmlns:r="http://schemas.openxmlformats.org/officeDocument/2006/relationships" xmlns:p="http://schemas.openxmlformats.org/presentationml/2006/main">
+  <p:cSld>
+    <p:spTree>
+      <p:nvGrpSpPr>
+        <p:cNvPr id="1" name=""/>
+        <p:cNvGrpSpPr/>
+        <p:nvPr/>
+      </p:nvGrpSpPr>
+      <p:grpSpPr>
+        <a:xfrm>
+          <a:off x="0" y="0"/>
+          <a:ext cx="0" cy="0"/>
+          <a:chOff x="0" y="0"/>
+          <a:chExt cx="0" cy="0"/>
+        </a:xfrm>
+      </p:grpSpPr>
+      <p:sp>
+        <p:nvSpPr>
+          <p:cNvPr id="2" name="Slide Image Placeholder 1"/>
+          <p:cNvSpPr>
+            <a:spLocks noGrp="1" noRot="1" noChangeAspect="1"/>
+          </p:cNvSpPr>
+          <p:nvPr>
+            <p:ph type="sldImg"/>
+          </p:nvPr>
+        </p:nvSpPr>
+        <p:spPr/>
+      </p:sp>
+      <p:sp>
+        <p:nvSpPr>
+          <p:cNvPr id="3" name="Notes Placeholder 2"/>
+          <p:cNvSpPr>
+            <a:spLocks noGrp="1"/>
+          </p:cNvSpPr>
+          <p:nvPr>
+            <p:ph type="body" idx="1"/>
+          </p:nvPr>
+        </p:nvSpPr>
+        <p:spPr/>
+        <p:txBody>
+          <a:bodyPr/>
+          <a:lstStyle/>
+          <a:p>
+            <a:r>
+              <a:rPr lang="en-US" dirty="0"/>
+              <a:t>The Starter Kit is in your downloads. It’s a great orientation to everything Modern Excel can do. Just know that the kit is a map, not a guide. If you want someone walking beside you telling you where to go, that’s what the membership is for.</a:t>
+            </a:r>
+          </a:p>
+        </p:txBody>
+      </p:sp>
+      <p:sp>
+        <p:nvSpPr>
+          <p:cNvPr id="4" name="Slide Number Placeholder 3"/>
+          <p:cNvSpPr>
+            <a:spLocks noGrp="1"/>
+          </p:cNvSpPr>
+          <p:nvPr>
+            <p:ph type="sldNum" sz="quarter" idx="5"/>
+          </p:nvPr>
+        </p:nvSpPr>
+        <p:spPr/>
+        <p:txBody>
+          <a:bodyPr/>
+          <a:lstStyle/>
+          <a:p>
+            <a:fld id="{1300335D-9F13-4B80-ADC5-B0EA3E10FF6B}" type="slidenum">
+              <a:rPr lang="en-US" smtClean="0"/>
+              <a:t>14</a:t>
+            </a:fld>
+            <a:endParaRPr lang="en-US"/>
+          </a:p>
+        </p:txBody>
+      </p:sp>
+    </p:spTree>
+  </p:cSld>
+  <p:clrMapOvr>
+    <a:masterClrMapping/>
+  </p:clrMapOvr>
+</p:notes>
+</file>
+
+<file path=ppt/notesSlides/notesSlide12.xml><?xml version="1.0" encoding="utf-8"?>
+<p:notes xmlns:a="http://schemas.openxmlformats.org/drawingml/2006/main" xmlns:r="http://schemas.openxmlformats.org/officeDocument/2006/relationships" xmlns:p="http://schemas.openxmlformats.org/presentationml/2006/main">
+  <p:cSld>
+    <p:spTree>
+      <p:nvGrpSpPr>
+        <p:cNvPr id="1" name=""/>
+        <p:cNvGrpSpPr/>
+        <p:nvPr/>
+      </p:nvGrpSpPr>
+      <p:grpSpPr>
+        <a:xfrm>
+          <a:off x="0" y="0"/>
+          <a:ext cx="0" cy="0"/>
+          <a:chOff x="0" y="0"/>
+          <a:chExt cx="0" cy="0"/>
+        </a:xfrm>
+      </p:grpSpPr>
+      <p:sp>
+        <p:nvSpPr>
+          <p:cNvPr id="2" name="Slide Image Placeholder 1"/>
+          <p:cNvSpPr>
+            <a:spLocks noGrp="1" noRot="1" noChangeAspect="1"/>
+          </p:cNvSpPr>
+          <p:nvPr>
+            <p:ph type="sldImg"/>
+          </p:nvPr>
+        </p:nvSpPr>
+        <p:spPr/>
+      </p:sp>
+      <p:sp>
+        <p:nvSpPr>
+          <p:cNvPr id="3" name="Notes Placeholder 2"/>
+          <p:cNvSpPr>
+            <a:spLocks noGrp="1"/>
+          </p:cNvSpPr>
+          <p:nvPr>
+            <p:ph type="body" idx="1"/>
+          </p:nvPr>
+        </p:nvSpPr>
+        <p:spPr/>
+        <p:txBody>
+          <a:bodyPr/>
+          <a:lstStyle/>
+          <a:p>
+            <a:r>
+              <a:rPr lang="en-US" dirty="0"/>
+              <a:t>If you know someone who’s still manually cleaning data every Monday morning or rebuilding the same report from scratch every month, send them this recording. That’s the person this is for.</a:t>
+            </a:r>
+          </a:p>
+        </p:txBody>
+      </p:sp>
+      <p:sp>
+        <p:nvSpPr>
+          <p:cNvPr id="4" name="Slide Number Placeholder 3"/>
+          <p:cNvSpPr>
+            <a:spLocks noGrp="1"/>
+          </p:cNvSpPr>
+          <p:nvPr>
+            <p:ph type="sldNum" sz="quarter" idx="5"/>
+          </p:nvPr>
+        </p:nvSpPr>
+        <p:spPr/>
+        <p:txBody>
+          <a:bodyPr/>
+          <a:lstStyle/>
+          <a:p>
+            <a:fld id="{1300335D-9F13-4B80-ADC5-B0EA3E10FF6B}" type="slidenum">
+              <a:rPr lang="en-US" smtClean="0"/>
+              <a:t>15</a:t>
+            </a:fld>
+            <a:endParaRPr lang="en-US"/>
+          </a:p>
+        </p:txBody>
+      </p:sp>
+    </p:spTree>
+  </p:cSld>
+  <p:clrMapOvr>
+    <a:masterClrMapping/>
+  </p:clrMapOvr>
+</p:notes>
+</file>
+
+<file path=ppt/notesSlides/notesSlide13.xml><?xml version="1.0" encoding="utf-8"?>
+<p:notes xmlns:a="http://schemas.openxmlformats.org/drawingml/2006/main" xmlns:r="http://schemas.openxmlformats.org/officeDocument/2006/relationships" xmlns:p="http://schemas.openxmlformats.org/presentationml/2006/main">
+  <p:cSld>
+    <p:spTree>
+      <p:nvGrpSpPr>
+        <p:cNvPr id="1" name=""/>
+        <p:cNvGrpSpPr/>
+        <p:nvPr/>
+      </p:nvGrpSpPr>
+      <p:grpSpPr>
+        <a:xfrm>
+          <a:off x="0" y="0"/>
+          <a:ext cx="0" cy="0"/>
+          <a:chOff x="0" y="0"/>
+          <a:chExt cx="0" cy="0"/>
+        </a:xfrm>
+      </p:grpSpPr>
+      <p:sp>
+        <p:nvSpPr>
+          <p:cNvPr id="2" name="Slide Image Placeholder 1"/>
+          <p:cNvSpPr>
+            <a:spLocks noGrp="1" noRot="1" noChangeAspect="1"/>
+          </p:cNvSpPr>
+          <p:nvPr>
+            <p:ph type="sldImg"/>
+          </p:nvPr>
+        </p:nvSpPr>
+        <p:spPr/>
+      </p:sp>
+      <p:sp>
+        <p:nvSpPr>
+          <p:cNvPr id="3" name="Notes Placeholder 2"/>
+          <p:cNvSpPr>
+            <a:spLocks noGrp="1"/>
+          </p:cNvSpPr>
+          <p:nvPr>
+            <p:ph type="body" idx="1"/>
+          </p:nvPr>
+        </p:nvSpPr>
+        <p:spPr/>
+        <p:txBody>
+          <a:bodyPr/>
+          <a:lstStyle/>
+          <a:p>
+            <a:r>
+              <a:rPr lang="en-US" dirty="0"/>
+              <a:t>Thank you for spending this time with me. I hope you got something useful out of today.</a:t>
+            </a:r>
+          </a:p>
+        </p:txBody>
+      </p:sp>
+      <p:sp>
+        <p:nvSpPr>
+          <p:cNvPr id="4" name="Slide Number Placeholder 3"/>
+          <p:cNvSpPr>
+            <a:spLocks noGrp="1"/>
+          </p:cNvSpPr>
+          <p:nvPr>
+            <p:ph type="sldNum" sz="quarter" idx="5"/>
+          </p:nvPr>
+        </p:nvSpPr>
+        <p:spPr/>
+        <p:txBody>
+          <a:bodyPr/>
+          <a:lstStyle/>
+          <a:p>
+            <a:fld id="{1300335D-9F13-4B80-ADC5-B0EA3E10FF6B}" type="slidenum">
+              <a:rPr lang="en-US" smtClean="0"/>
+              <a:t>16</a:t>
+            </a:fld>
+            <a:endParaRPr lang="en-US"/>
+          </a:p>
+        </p:txBody>
+      </p:sp>
+    </p:spTree>
+  </p:cSld>
+  <p:clrMapOvr>
+    <a:masterClrMapping/>
+  </p:clrMapOvr>
+</p:notes>
+</file>
+
 <file path=ppt/notesSlides/notesSlide2.xml><?xml version="1.0" encoding="utf-8"?>
 <p:notes xmlns:a="http://schemas.openxmlformats.org/drawingml/2006/main" xmlns:r="http://schemas.openxmlformats.org/officeDocument/2006/relationships" xmlns:p="http://schemas.openxmlformats.org/presentationml/2006/main">
   <p:cSld>
@@ -3907,10 +4235,10 @@
           <a:bodyPr/>
           <a:lstStyle/>
           <a:p>
-            <a:pPr marL="228600" indent="-228600">
-              <a:buAutoNum type="arabicPeriod"/>
-            </a:pPr>
-            <a:endParaRPr lang="en-US" dirty="0"/>
+            <a:r>
+              <a:rPr lang="en-US" dirty="0"/>
+              <a:t>So now you have a proper Excel Table. It auto-expands, it has structured references, it’s clean. But here’s what I want you to notice: this Table is still sitting by itself. What happens when you need to connect it to another dataset? Say you have a sales table AND a customer table, and you need to analyze them together. That’s where the Data Model comes in, and that’s where things get really powerful. We’re not going there today, but just know: what you just built is the foundation for something much bigger.</a:t>
+            </a:r>
           </a:p>
         </p:txBody>
       </p:sp>
@@ -4012,10 +4340,10 @@
           <a:bodyPr/>
           <a:lstStyle/>
           <a:p>
-            <a:pPr marL="228600" indent="-228600">
-              <a:buAutoNum type="arabicPeriod"/>
-            </a:pPr>
-            <a:endParaRPr lang="en-US" dirty="0"/>
+            <a:r>
+              <a:rPr lang="en-US" dirty="0"/>
+              <a:t>Pretty cool, right? Analyze Data gave you instant charts and summaries with zero formulas. But I want to be upfront about something: this is great for quick exploration. It’s not great for repeatable analysis. Next week when your boss asks “can you run that same analysis on the new numbers?” you’re starting from scratch. There’s no saved workflow. That’s the gap between a quick insight and a reliable process — and it’s the gap most Excel users never close.</a:t>
+            </a:r>
           </a:p>
         </p:txBody>
       </p:sp>
@@ -4123,10 +4451,16 @@
           <a:bodyPr/>
           <a:lstStyle/>
           <a:p>
-            <a:pPr marL="228600" indent="-228600">
-              <a:buAutoNum type="arabicPeriod"/>
-            </a:pPr>
-            <a:endParaRPr lang="en-US" dirty="0"/>
+            <a:r>
+              <a:rPr lang="en-US" dirty="0"/>
+              <a:t>OK so now your data is clean and it refreshes automatically. Beautiful. But what would you do next? You’d probably load this into the Data Model, create a relationship with another table, build a PivotTable with DAX measures, maybe even bring Python in for a statistical breakdown. That’s the full pipeline — from messy raw data all the way to an insight your team can act on. We just did step one.</a:t>
+            </a:r>
+          </a:p>
+          <a:p>
+            <a:r>
+              <a:rPr lang="en-US" dirty="0"/>
+              <a:t>I’m not going to pretend steps two through five are simple enough for a demo. That’s the work I do with people in the Modern Excel AI Stack.</a:t>
+            </a:r>
           </a:p>
         </p:txBody>
       </p:sp>
@@ -4218,23 +4552,14 @@
           <a:p>
             <a:r>
               <a:rPr lang="en-US" dirty="0"/>
-              <a:t>A book with 500 recipes isn’t actually that helpful. At that point you’re just hoarding information. It gives you options, but no direction. AI is already excellent at producing that kind of broad, undifferentiated content.</a:t>
+              <a:t>You just saw three genuinely useful things. And you could absolutely go home and use all of them tomorrow. But here’s what I’ve seen happen hundreds of times: someone watches a demo like this, tries it on Monday, hits a snag that wasn’t in the demo, Googles around for 45 minutes, gets a partial answer, and moves on. Two weeks later they’re back to doing it the old way.</a:t>
             </a:r>
           </a:p>
           <a:p>
             <a:r>
               <a:rPr lang="en-US" dirty="0"/>
-              <a:t>What’s missing is a curated, expert perspective. Someone who has the experience to say: cook this, in this order, this way, and ignore the rest. That’s the difference between being exposed to patterns and actually getting something done.</a:t>
-            </a:r>
-          </a:p>
-          <a:p>
-            <a:r>
-              <a:rPr lang="en-US" dirty="0"/>
-              <a:t>That’s why free content is good for orientation and exploration, but paid content is where execution happens. You’re not paying for more recipes, you’re paying for judgment, sequencing, and a clear point of view that helps you solve a specific problem without drowning in choices.</a:t>
-            </a:r>
-          </a:p>
-          <a:p>
-            <a:endParaRPr lang="en-US" dirty="0"/>
+              <a:t>Free content — including today — is great at showing you what’s possible. What it can’t do is hold your hand through the messy middle when your actual data doesn’t look like the demo data. That’s not a flaw in the content. It’s just the nature of free. If you’re here for the third or fourth time and still feel stuck, that’s not a failure — it’s a signal that you need structure, not more content.</a:t>
+            </a:r>
           </a:p>
         </p:txBody>
       </p:sp>
@@ -4320,34 +4645,25 @@
           <a:p>
             <a:r>
               <a:rPr lang="en-US" dirty="0"/>
-              <a:t>I work with individuals, teams, and organizations at different levels, but the philosophy is always the same: reduce chaos, increase clarity, and build workflows that actually hold up over time. </a:t>
-            </a:r>
-          </a:p>
-          <a:p>
-            <a:endParaRPr lang="en-US" dirty="0"/>
+              <a:t>I work with individuals, teams, and organizations at different levels, but the philosophy is always the same: reduce chaos, increase clarity, and build workflows that actually hold up over time.</a:t>
+            </a:r>
           </a:p>
           <a:p>
             <a:r>
               <a:rPr lang="en-US" dirty="0"/>
-              <a:t>For individuals, this usually means self-paced courses or live workshops focused not just on learning features, but on developing judgment — understanding when to use formulas, Power Query, Python, or Copilot, and when not to. The emphasis is on clarity, maintainability, and confidence, so people feel more capable rather than more dependent on tools or experts. </a:t>
-            </a:r>
-          </a:p>
-          <a:p>
-            <a:endParaRPr lang="en-US" dirty="0"/>
+              <a:t>For individuals, this usually means self-paced courses or live workshops focused not just on learning features, but on developing judgment — understanding when to use formulas, Power Query, Python, or Copilot, and when not to.</a:t>
+            </a:r>
           </a:p>
           <a:p>
             <a:r>
               <a:rPr lang="en-US" dirty="0"/>
-              <a:t>With teams, the work becomes more applied and workflow-driven, focusing on practical corporate training that helps reduce errors, rework, and fragile one-off fixes by applying modern Excel patterns to real business processes. </a:t>
-            </a:r>
-          </a:p>
-          <a:p>
-            <a:endParaRPr lang="en-US" dirty="0"/>
+              <a:t>With teams, the work becomes more applied and workflow-driven — practical corporate training that helps reduce errors, rework, and fragile one-off fixes by applying modern Excel patterns to real business processes.</a:t>
+            </a:r>
           </a:p>
           <a:p>
             <a:r>
               <a:rPr lang="en-US" dirty="0"/>
-              <a:t>At the organizational level, this often takes the form of a guided, multi-week modernization program where teams learn to build pipelines, automation, and documentation around Excel-based systems, with the goal of creating reliable, auditable workflows and true internal ownership rather than reliance on individual hero analysts.</a:t>
+              <a:t>At the organizational level, this often takes the form of a guided, multi-week modernization program where teams learn to build pipelines, automation, and documentation around Excel-based systems.</a:t>
             </a:r>
           </a:p>
         </p:txBody>
@@ -4434,98 +4750,20 @@
           <a:p>
             <a:r>
               <a:rPr lang="en-US" dirty="0"/>
-              <a:t>There’s a PDF guide to this in the downloads</a:t>
-            </a:r>
-          </a:p>
-          <a:p>
-            <a:endParaRPr lang="en-US" dirty="0"/>
+              <a:t>If you got value from today and you want to keep going — not just watch another demo in six months, but actually build the full pipeline we talked about — the Modern Excel AI Stack is where that happens. It’s a membership, not a big course. You get ongoing guidance as tools change, and you’re not starting from scratch every time Microsoft ships something new.</a:t>
+            </a:r>
           </a:p>
           <a:p>
             <a:r>
               <a:rPr lang="en-US" dirty="0"/>
-              <a:t>If you’re feeling unsure where to start, this is really about matching the learning path to what you actually need right now, not what sounds most impressive. Different goals call for different levels of structure and support.</a:t>
+              <a:t>If you want to go deep on one specific topic, I have standalone courses like Python in Excel: Quick Wins. If you prefer self-paced, my LinkedIn Learning courses are designed to be clear and sequenced. If you want live, hands-on training, that’s what my O’Reilly sessions and Eventbrite workshops are for.</a:t>
             </a:r>
           </a:p>
           <a:p>
             <a:r>
               <a:rPr lang="en-US" dirty="0"/>
-              <a:t>If you’re new to Excel plus AI, the right starting point is </a:t>
-            </a:r>
-            <a:r>
-              <a:rPr lang="en-US" b="1" dirty="0"/>
-              <a:t>Excel Must-Knows for AI Success</a:t>
-            </a:r>
-            <a:r>
-              <a:rPr lang="en-US" dirty="0"/>
-              <a:t>. That’s about building the foundational Excel habits and concepts that make AI tools actually useful, instead of confusing or misleading.</a:t>
-            </a:r>
-          </a:p>
-          <a:p>
-            <a:r>
-              <a:rPr lang="en-US" dirty="0"/>
-              <a:t>If your goal is specifically Python in Excel, then </a:t>
-            </a:r>
-            <a:r>
-              <a:rPr lang="en-US" b="1" dirty="0"/>
-              <a:t>Python in Excel: Quick Wins</a:t>
-            </a:r>
-            <a:r>
-              <a:rPr lang="en-US" dirty="0"/>
-              <a:t> is designed to get you productive fast. It focuses on practical examples so you can see value quickly without needing a computer science background.</a:t>
-            </a:r>
-          </a:p>
-          <a:p>
-            <a:r>
-              <a:rPr lang="en-US" dirty="0"/>
-              <a:t>If you prefer structured, self-paced learning you can dip into on your own schedule, my </a:t>
-            </a:r>
-            <a:r>
-              <a:rPr lang="en-US" b="1" dirty="0"/>
-              <a:t>LinkedIn Learning</a:t>
-            </a:r>
-            <a:r>
-              <a:rPr lang="en-US" dirty="0"/>
-              <a:t> courses are a good fit. They’re designed to be clear, sequenced, and easy to revisit when you need a refresher.</a:t>
-            </a:r>
-          </a:p>
-          <a:p>
-            <a:r>
-              <a:rPr lang="en-US" dirty="0"/>
-              <a:t>If you want live, hands-on training where you can ask questions and work through examples in real time, that’s where </a:t>
-            </a:r>
-            <a:r>
-              <a:rPr lang="en-US" b="1" dirty="0"/>
-              <a:t>O’Reilly sessions</a:t>
-            </a:r>
-            <a:r>
-              <a:rPr lang="en-US" dirty="0"/>
-              <a:t> or </a:t>
-            </a:r>
-            <a:r>
-              <a:rPr lang="en-US" b="1" dirty="0"/>
-              <a:t>Eventbrite workshops</a:t>
-            </a:r>
-            <a:r>
-              <a:rPr lang="en-US" dirty="0"/>
-              <a:t> make the most sense. That’s for people who learn best by doing, with guidance.</a:t>
-            </a:r>
-          </a:p>
-          <a:p>
-            <a:r>
-              <a:rPr lang="en-US" dirty="0"/>
-              <a:t>And if what you want is ongoing guidance without committing to a large, one-time course, </a:t>
-            </a:r>
-            <a:r>
-              <a:rPr lang="en-US" b="1" dirty="0"/>
-              <a:t>The Modern Excel AI Stack</a:t>
-            </a:r>
-            <a:r>
-              <a:rPr lang="en-US" dirty="0"/>
-              <a:t> membership is meant to fill that gap. It’s there for continued direction as tools evolve and new questions come up, so you’re not constantly restarting from scratch.</a:t>
-            </a:r>
-          </a:p>
-          <a:p>
-            <a:endParaRPr lang="en-US" dirty="0"/>
+              <a:t>And if you’re a manager or team lead and you’re thinking “my whole team needs this,” book a discovery call. That link is on the slide.</a:t>
+            </a:r>
           </a:p>
         </p:txBody>
       </p:sp>
@@ -4558,6 +4796,194 @@
         <p14:creationId xmlns:p14="http://schemas.microsoft.com/office/powerpoint/2010/main" val="1958501508"/>
       </p:ext>
     </p:extLst>
+  </p:cSld>
+  <p:clrMapOvr>
+    <a:masterClrMapping/>
+  </p:clrMapOvr>
+</p:notes>
+</file>
+
+<file path=ppt/notesSlides/notesSlide8.xml><?xml version="1.0" encoding="utf-8"?>
+<p:notes xmlns:a="http://schemas.openxmlformats.org/drawingml/2006/main" xmlns:r="http://schemas.openxmlformats.org/officeDocument/2006/relationships" xmlns:p="http://schemas.openxmlformats.org/presentationml/2006/main">
+  <p:cSld>
+    <p:spTree>
+      <p:nvGrpSpPr>
+        <p:cNvPr id="1" name=""/>
+        <p:cNvGrpSpPr/>
+        <p:nvPr/>
+      </p:nvGrpSpPr>
+      <p:grpSpPr>
+        <a:xfrm>
+          <a:off x="0" y="0"/>
+          <a:ext cx="0" cy="0"/>
+          <a:chOff x="0" y="0"/>
+          <a:chExt cx="0" cy="0"/>
+        </a:xfrm>
+      </p:grpSpPr>
+      <p:sp>
+        <p:nvSpPr>
+          <p:cNvPr id="2" name="Slide Image Placeholder 1"/>
+          <p:cNvSpPr>
+            <a:spLocks noGrp="1" noRot="1" noChangeAspect="1"/>
+          </p:cNvSpPr>
+          <p:nvPr>
+            <p:ph type="sldImg"/>
+          </p:nvPr>
+        </p:nvSpPr>
+        <p:spPr/>
+      </p:sp>
+      <p:sp>
+        <p:nvSpPr>
+          <p:cNvPr id="3" name="Notes Placeholder 2"/>
+          <p:cNvSpPr>
+            <a:spLocks noGrp="1"/>
+          </p:cNvSpPr>
+          <p:nvPr>
+            <p:ph type="body" idx="1"/>
+          </p:nvPr>
+        </p:nvSpPr>
+        <p:spPr/>
+        <p:txBody>
+          <a:bodyPr/>
+          <a:lstStyle/>
+          <a:p>
+            <a:r>
+              <a:rPr lang="en-US" dirty="0"/>
+              <a:t>Those three things are genuinely useful and you can use them tomorrow. But I’d be doing you a disservice if I pretended that’s the whole story.</a:t>
+            </a:r>
+          </a:p>
+          <a:p>
+            <a:r>
+              <a:rPr lang="en-US" dirty="0"/>
+              <a:t>Tables give you structure — but a table sitting by itself is still flat. You can’t relate it to other data, you can’t build measures on top of it, you can’t answer questions that span multiple datasets. For that you need the Data Model, and most people never get there.</a:t>
+            </a:r>
+          </a:p>
+          <a:p>
+            <a:r>
+              <a:rPr lang="en-US" dirty="0"/>
+              <a:t>Power Query cleaned your data beautifully — once. But what happens next month when the source file changes format? Or when you need to merge five files instead of one? Or when someone asks why your numbers don’t match finance’s report? One cleanup is not a pipeline. A pipeline is something that runs reliably every time without you babysitting it.</a:t>
+            </a:r>
+          </a:p>
+          <a:p>
+            <a:r>
+              <a:rPr lang="en-US" dirty="0"/>
+              <a:t>Analyze Data gave you quick insights — but they’re gone the moment you close the pane. There’s no saved analysis. No audit trail. No way to hand it to a colleague and say “here, run this again next quarter.” Quick insights are great for exploration, but they’re not how you make decisions you can defend.</a:t>
+            </a:r>
+          </a:p>
+          <a:p>
+            <a:r>
+              <a:rPr lang="en-US" dirty="0"/>
+              <a:t>Each of these is step one of a longer process. And the gap between step one and a reliable workflow is where most people get stuck and give up.</a:t>
+            </a:r>
+          </a:p>
+        </p:txBody>
+      </p:sp>
+      <p:sp>
+        <p:nvSpPr>
+          <p:cNvPr id="4" name="Slide Number Placeholder 3"/>
+          <p:cNvSpPr>
+            <a:spLocks noGrp="1"/>
+          </p:cNvSpPr>
+          <p:nvPr>
+            <p:ph type="sldNum" sz="quarter" idx="5"/>
+          </p:nvPr>
+        </p:nvSpPr>
+        <p:spPr/>
+        <p:txBody>
+          <a:bodyPr/>
+          <a:lstStyle/>
+          <a:p>
+            <a:fld id="{1300335D-9F13-4B80-ADC5-B0EA3E10FF6B}" type="slidenum">
+              <a:rPr lang="en-US" smtClean="0"/>
+              <a:t>8</a:t>
+            </a:fld>
+            <a:endParaRPr lang="en-US"/>
+          </a:p>
+        </p:txBody>
+      </p:sp>
+    </p:spTree>
+  </p:cSld>
+  <p:clrMapOvr>
+    <a:masterClrMapping/>
+  </p:clrMapOvr>
+</p:notes>
+</file>
+
+<file path=ppt/notesSlides/notesSlide9.xml><?xml version="1.0" encoding="utf-8"?>
+<p:notes xmlns:a="http://schemas.openxmlformats.org/drawingml/2006/main" xmlns:r="http://schemas.openxmlformats.org/officeDocument/2006/relationships" xmlns:p="http://schemas.openxmlformats.org/presentationml/2006/main">
+  <p:cSld>
+    <p:spTree>
+      <p:nvGrpSpPr>
+        <p:cNvPr id="1" name=""/>
+        <p:cNvGrpSpPr/>
+        <p:nvPr/>
+      </p:nvGrpSpPr>
+      <p:grpSpPr>
+        <a:xfrm>
+          <a:off x="0" y="0"/>
+          <a:ext cx="0" cy="0"/>
+          <a:chOff x="0" y="0"/>
+          <a:chExt cx="0" cy="0"/>
+        </a:xfrm>
+      </p:grpSpPr>
+      <p:sp>
+        <p:nvSpPr>
+          <p:cNvPr id="2" name="Slide Image Placeholder 1"/>
+          <p:cNvSpPr>
+            <a:spLocks noGrp="1" noRot="1" noChangeAspect="1"/>
+          </p:cNvSpPr>
+          <p:nvPr>
+            <p:ph type="sldImg"/>
+          </p:nvPr>
+        </p:nvSpPr>
+        <p:spPr/>
+      </p:sp>
+      <p:sp>
+        <p:nvSpPr>
+          <p:cNvPr id="3" name="Notes Placeholder 2"/>
+          <p:cNvSpPr>
+            <a:spLocks noGrp="1"/>
+          </p:cNvSpPr>
+          <p:nvPr>
+            <p:ph type="body" idx="1"/>
+          </p:nvPr>
+        </p:nvSpPr>
+        <p:spPr/>
+        <p:txBody>
+          <a:bodyPr/>
+          <a:lstStyle/>
+          <a:p>
+            <a:r>
+              <a:rPr lang="en-US" dirty="0"/>
+              <a:t>I want to give you a clear picture of everything I offer so you can decide what’s right for you. I’m not going to be coy about the fact that I have paid offerings. I think you deserve to know what exists.</a:t>
+            </a:r>
+          </a:p>
+        </p:txBody>
+      </p:sp>
+      <p:sp>
+        <p:nvSpPr>
+          <p:cNvPr id="4" name="Slide Number Placeholder 3"/>
+          <p:cNvSpPr>
+            <a:spLocks noGrp="1"/>
+          </p:cNvSpPr>
+          <p:nvPr>
+            <p:ph type="sldNum" sz="quarter" idx="5"/>
+          </p:nvPr>
+        </p:nvSpPr>
+        <p:spPr/>
+        <p:txBody>
+          <a:bodyPr/>
+          <a:lstStyle/>
+          <a:p>
+            <a:fld id="{1300335D-9F13-4B80-ADC5-B0EA3E10FF6B}" type="slidenum">
+              <a:rPr lang="en-US" smtClean="0"/>
+              <a:t>9</a:t>
+            </a:fld>
+            <a:endParaRPr lang="en-US"/>
+          </a:p>
+        </p:txBody>
+      </p:sp>
+    </p:spTree>
   </p:cSld>
   <p:clrMapOvr>
     <a:masterClrMapping/>
@@ -7760,7 +8186,7 @@
                 </a:solidFill>
                 <a:latin typeface="Pragmatica" panose="020B0403040502020204" pitchFamily="34" charset="0"/>
               </a:rPr>
-              <a:t>Blog: </a:t>
+              <a:t xml:space="preserve">Blog: </a:t>
             </a:r>
             <a:r>
               <a:rPr lang="en-US" sz="6000" dirty="0">
@@ -7785,7 +8211,7 @@
                 </a:solidFill>
                 <a:latin typeface="Pragmatica" panose="020B0403040502020204" pitchFamily="34" charset="0"/>
               </a:rPr>
-              <a:t>  </a:t>
+              <a:t xml:space="preserve">  </a:t>
             </a:r>
           </a:p>
           <a:p>
@@ -7862,7 +8288,7 @@
       </p:sp>
       <p:pic>
         <p:nvPicPr>
-          <p:cNvPr id="15" name="Picture 14" descr="A close up of a sign&#10;&#10;Description automatically generated">
+          <p:cNvPr id="15" name="Picture 14" descr="A close up of a sign  Description automatically generated">
             <a:extLst>
               <a:ext uri="{FF2B5EF4-FFF2-40B4-BE49-F238E27FC236}">
                 <a16:creationId xmlns:a16="http://schemas.microsoft.com/office/drawing/2014/main" id="{0FC37808-A34B-5C68-C9BC-F79DB06A951B}"/>
@@ -8001,7 +8427,7 @@
       </p:sp>
       <p:pic>
         <p:nvPicPr>
-          <p:cNvPr id="15" name="Picture 14" descr="A close up of a sign&#10;&#10;Description automatically generated">
+          <p:cNvPr id="15" name="Picture 14" descr="A close up of a sign  Description automatically generated">
             <a:extLst>
               <a:ext uri="{FF2B5EF4-FFF2-40B4-BE49-F238E27FC236}">
                 <a16:creationId xmlns:a16="http://schemas.microsoft.com/office/drawing/2014/main" id="{AC82ECB6-E6FE-DDE5-7269-AB90DC1212AB}"/>
@@ -8140,7 +8566,7 @@
             </a:pPr>
             <a:r>
               <a:rPr lang="en-US" sz="2800" dirty="0"/>
-              <a:t>Orientation</a:t>
+              <a:t>Seeing what’s possible (like today)</a:t>
             </a:r>
           </a:p>
           <a:p>
@@ -8150,7 +8576,7 @@
             </a:pPr>
             <a:r>
               <a:rPr lang="en-US" sz="2800" dirty="0"/>
-              <a:t>Pattern exposure</a:t>
+              <a:t>Knowing features exist</a:t>
             </a:r>
           </a:p>
           <a:p>
@@ -8160,7 +8586,7 @@
             </a:pPr>
             <a:r>
               <a:rPr lang="en-US" sz="2800" dirty="0"/>
-              <a:t>Seeing examples in context</a:t>
+              <a:t>Getting inspired to try things</a:t>
             </a:r>
           </a:p>
         </p:txBody>
@@ -8205,7 +8631,7 @@
             </a:pPr>
             <a:r>
               <a:rPr lang="en-US" sz="2800" dirty="0"/>
-              <a:t>Solving specific problems</a:t>
+              <a:t>Building the full pipeline you saw gaps in</a:t>
             </a:r>
           </a:p>
           <a:p>
@@ -8215,7 +8641,7 @@
             </a:pPr>
             <a:r>
               <a:rPr lang="en-US" sz="2800" dirty="0"/>
-              <a:t>Step-by-step implementation</a:t>
+              <a:t>Someone saying “do this next, skip that”</a:t>
             </a:r>
           </a:p>
           <a:p>
@@ -8225,7 +8651,7 @@
             </a:pPr>
             <a:r>
               <a:rPr lang="en-US" sz="2800" dirty="0"/>
-              <a:t>Ongoing feedback</a:t>
+              <a:t>Not starting over every time tools change</a:t>
             </a:r>
           </a:p>
         </p:txBody>
@@ -8394,7 +8820,7 @@
               <a:rPr lang="en-US" sz="9000" dirty="0">
                 <a:latin typeface="Aliens &amp; cows" panose="00000500000000000000" pitchFamily="2" charset="0"/>
               </a:rPr>
-              <a:t>Not sure where to start?</a:t>
+              <a:t>One next step</a:t>
             </a:r>
           </a:p>
         </p:txBody>
@@ -8435,14 +8861,14 @@
               <a:rPr lang="en-US" sz="4400" dirty="0">
                 <a:latin typeface="Pragmatica" panose="020B0403040502020204"/>
               </a:rPr>
-              <a:t>If you’re new to Excel + AI → start with </a:t>
+              <a:t>Want the full pipeline, not just demos? → </a:t>
             </a:r>
             <a:r>
               <a:rPr lang="en-US" sz="4400" b="1" u="sng" dirty="0">
                 <a:latin typeface="Pragmatica" panose="020B0403040502020204"/>
-                <a:hlinkClick r:id="rId3"/>
+                <a:hlinkClick r:id="rId8"/>
               </a:rPr>
-              <a:t>Excel Must-Knows for AI Success</a:t>
+              <a:t>The Modern Excel AI Stack</a:t>
             </a:r>
             <a:r>
               <a:rPr lang="en-US" sz="4400" dirty="0">
@@ -8460,7 +8886,7 @@
               <a:rPr lang="en-US" sz="4400" dirty="0">
                 <a:latin typeface="Pragmatica" panose="020B0403040502020204"/>
               </a:rPr>
-              <a:t>If you want to learn Python in Excel → begin with </a:t>
+              <a:t>Want to go deep on one topic? → Try </a:t>
             </a:r>
             <a:r>
               <a:rPr lang="en-US" sz="4400" b="1" u="sng" dirty="0">
@@ -8482,7 +8908,7 @@
               <a:rPr lang="en-US" sz="4400" dirty="0">
                 <a:latin typeface="Pragmatica" panose="020B0403040502020204"/>
               </a:rPr>
-              <a:t>If you prefer structured self-paced learning → take my </a:t>
+              <a:t>Prefer self-paced? → My </a:t>
             </a:r>
             <a:r>
               <a:rPr lang="en-US" sz="4400" b="1" u="sng" dirty="0">
@@ -8495,7 +8921,7 @@
               <a:rPr lang="en-US" sz="4400" dirty="0">
                 <a:latin typeface="Pragmatica" panose="020B0403040502020204"/>
               </a:rPr>
-              <a:t> courses</a:t>
+              <a:t xml:space="preserve"> courses</a:t>
             </a:r>
           </a:p>
           <a:p>
@@ -8507,7 +8933,7 @@
               <a:rPr lang="en-US" sz="4400" dirty="0">
                 <a:latin typeface="Pragmatica" panose="020B0403040502020204"/>
               </a:rPr>
-              <a:t>If you want live, hands-on training → join an </a:t>
+              <a:t>Want live training? → Join an </a:t>
             </a:r>
             <a:r>
               <a:rPr lang="en-US" sz="4400" b="1" u="sng" dirty="0">
@@ -8545,27 +8971,21 @@
               <a:rPr lang="en-US" sz="4400" dirty="0">
                 <a:latin typeface="Pragmatica" panose="020B0403040502020204"/>
               </a:rPr>
-              <a:t>If you want ongoing guidance without a big course → join </a:t>
+              <a:t>For teams/organizations → Book a </a:t>
             </a:r>
             <a:r>
               <a:rPr lang="en-US" sz="4400" b="1" u="sng" dirty="0">
                 <a:latin typeface="Pragmatica" panose="020B0403040502020204"/>
-                <a:hlinkClick r:id="rId8"/>
+                <a:hlinkClick r:id="rId10"/>
               </a:rPr>
-              <a:t>The Modern Excel AI Stack</a:t>
-            </a:r>
-            <a:r>
-              <a:rPr lang="en-US" sz="4400" dirty="0">
-                <a:latin typeface="Pragmatica" panose="020B0403040502020204"/>
-              </a:rPr>
-              <a:t> (membership)</a:t>
+              <a:t>discovery call</a:t>
             </a:r>
           </a:p>
         </p:txBody>
       </p:sp>
       <p:pic>
         <p:nvPicPr>
-          <p:cNvPr id="15" name="Picture 14" descr="A close up of a sign&#10;&#10;Description automatically generated">
+          <p:cNvPr id="15" name="Picture 14" descr="A close up of a sign  Description automatically generated">
             <a:extLst>
               <a:ext uri="{FF2B5EF4-FFF2-40B4-BE49-F238E27FC236}">
                 <a16:creationId xmlns:a16="http://schemas.microsoft.com/office/drawing/2014/main" id="{BD2DCCC6-87AC-828C-1922-475B4458EAF8}"/>
@@ -8986,13 +9406,13 @@
               <a:buChar char="•"/>
             </a:pPr>
             <a:r>
-              <a:rPr lang="en-US" sz="6000" dirty="0">
+              <a:rPr lang="en-US" sz="4800" dirty="0">
                 <a:solidFill>
                   <a:srgbClr val="707070"/>
                 </a:solidFill>
                 <a:latin typeface="Pragmatica" panose="020B0403040502020204" pitchFamily="34" charset="0"/>
               </a:rPr>
-              <a:t>Modern Excel Starter Kit PDF</a:t>
+              <a:t>Download: Modern Excel Starter Kit PDF</a:t>
             </a:r>
           </a:p>
           <a:p>
@@ -9004,7 +9424,7 @@
               <a:buChar char="•"/>
             </a:pPr>
             <a:r>
-              <a:rPr lang="en-US" sz="6000" dirty="0">
+              <a:rPr lang="en-US" sz="4800" dirty="0">
                 <a:solidFill>
                   <a:srgbClr val="707070"/>
                 </a:solidFill>
@@ -9022,20 +9442,20 @@
               <a:buChar char="•"/>
             </a:pPr>
             <a:r>
-              <a:rPr lang="en-US" sz="6000" dirty="0">
+              <a:rPr lang="en-US" sz="4800" dirty="0">
                 <a:solidFill>
                   <a:srgbClr val="707070"/>
                 </a:solidFill>
                 <a:latin typeface="Pragmatica" panose="020B0403040502020204" pitchFamily="34" charset="0"/>
               </a:rPr>
-              <a:t>Available in the downloads folder</a:t>
+              <a:t>But remember: the kit shows you what exists. The membership shows you what to do with it.</a:t>
             </a:r>
           </a:p>
         </p:txBody>
       </p:sp>
       <p:pic>
         <p:nvPicPr>
-          <p:cNvPr id="15" name="Picture 14" descr="A close up of a sign&#10;&#10;Description automatically generated">
+          <p:cNvPr id="15" name="Picture 14" descr="A close up of a sign  Description automatically generated">
             <a:extLst>
               <a:ext uri="{FF2B5EF4-FFF2-40B4-BE49-F238E27FC236}">
                 <a16:creationId xmlns:a16="http://schemas.microsoft.com/office/drawing/2014/main" id="{B155E1CE-7355-30EE-3EE6-738EC928753C}"/>
@@ -9202,7 +9622,7 @@
                 </a:solidFill>
                 <a:latin typeface="Pragmatica" panose="020B0403040502020204" pitchFamily="34" charset="0"/>
               </a:rPr>
-              <a:t>Share this event with your network</a:t>
+              <a:t>Share this event with someone who’s still doing it the hard way</a:t>
             </a:r>
           </a:p>
           <a:p>
@@ -9220,7 +9640,7 @@
                 </a:solidFill>
                 <a:latin typeface="Pragmatica" panose="020B0403040502020204" pitchFamily="34" charset="0"/>
               </a:rPr>
-              <a:t>For teams/organizations: Book a discovery call at </a:t>
+              <a:t xml:space="preserve">For teams/organizations: Book a discovery call at </a:t>
             </a:r>
             <a:r>
               <a:rPr lang="en-US" sz="6000" dirty="0">
@@ -9245,14 +9665,14 @@
                 </a:solidFill>
                 <a:latin typeface="Pragmatica" panose="020B0403040502020204" pitchFamily="34" charset="0"/>
               </a:rPr>
-              <a:t> </a:t>
+              <a:t xml:space="preserve"> </a:t>
             </a:r>
           </a:p>
         </p:txBody>
       </p:sp>
       <p:pic>
         <p:nvPicPr>
-          <p:cNvPr id="15" name="Picture 14" descr="A close up of a sign&#10;&#10;Description automatically generated">
+          <p:cNvPr id="15" name="Picture 14" descr="A close up of a sign  Description automatically generated">
             <a:extLst>
               <a:ext uri="{FF2B5EF4-FFF2-40B4-BE49-F238E27FC236}">
                 <a16:creationId xmlns:a16="http://schemas.microsoft.com/office/drawing/2014/main" id="{23401A70-278E-956F-C05F-181A5C8C8A73}"/>
@@ -9787,7 +10207,7 @@
       </p:pic>
       <p:pic>
         <p:nvPicPr>
-          <p:cNvPr id="8" name="Picture 7" descr="Logo&#10;&#10;Description automatically generated">
+          <p:cNvPr id="8" name="Picture 7" descr="Logo  Description automatically generated">
             <a:extLst>
               <a:ext uri="{FF2B5EF4-FFF2-40B4-BE49-F238E27FC236}">
                 <a16:creationId xmlns:a16="http://schemas.microsoft.com/office/drawing/2014/main" id="{97E0F267-87DF-961E-1FAA-47FD4F27A5C6}"/>
@@ -10102,7 +10522,7 @@
       </p:sp>
       <p:pic>
         <p:nvPicPr>
-          <p:cNvPr id="15" name="Picture 14" descr="A close up of a sign&#10;&#10;Description automatically generated">
+          <p:cNvPr id="15" name="Picture 14" descr="A close up of a sign  Description automatically generated">
             <a:extLst>
               <a:ext uri="{FF2B5EF4-FFF2-40B4-BE49-F238E27FC236}">
                 <a16:creationId xmlns:a16="http://schemas.microsoft.com/office/drawing/2014/main" id="{29761B90-A7DE-4A60-A915-F085BD87CAB4}"/>
@@ -10251,7 +10671,7 @@
                 </a:solidFill>
                 <a:latin typeface="Pragmatica" panose="020B0403040502020204" pitchFamily="34" charset="0"/>
               </a:rPr>
-              <a:t>Download at </a:t>
+              <a:t xml:space="preserve">Download at </a:t>
             </a:r>
             <a:r>
               <a:rPr lang="en-US" sz="9600" dirty="0">
@@ -10276,14 +10696,14 @@
                 </a:solidFill>
                 <a:latin typeface="Pragmatica" panose="020B0403040502020204" pitchFamily="34" charset="0"/>
               </a:rPr>
-              <a:t> </a:t>
+              <a:t xml:space="preserve"> </a:t>
             </a:r>
           </a:p>
         </p:txBody>
       </p:sp>
       <p:pic>
         <p:nvPicPr>
-          <p:cNvPr id="15" name="Picture 14" descr="A close up of a sign&#10;&#10;Description automatically generated">
+          <p:cNvPr id="15" name="Picture 14" descr="A close up of a sign  Description automatically generated">
             <a:extLst>
               <a:ext uri="{FF2B5EF4-FFF2-40B4-BE49-F238E27FC236}">
                 <a16:creationId xmlns:a16="http://schemas.microsoft.com/office/drawing/2014/main" id="{9B8F3280-B18F-CF7A-E13E-97BB5CDA86E8}"/>
@@ -11157,7 +11577,7 @@
               <a:rPr lang="en-US" sz="9000" dirty="0">
                 <a:latin typeface="Aliens &amp; cows" panose="00000500000000000000" pitchFamily="2" charset="0"/>
               </a:rPr>
-              <a:t>Recap</a:t>
+              <a:t>What you saw vs. what’s left</a:t>
             </a:r>
           </a:p>
         </p:txBody>
@@ -11204,7 +11624,7 @@
                 </a:solidFill>
                 <a:latin typeface="Pragmatica" panose="020B0403040502020204" pitchFamily="34" charset="0"/>
               </a:rPr>
-              <a:t>Tables → Structured efficiency</a:t>
+              <a:t>Tables → but without a Data Model, still flat</a:t>
             </a:r>
           </a:p>
           <a:p>
@@ -11222,7 +11642,7 @@
                 </a:solidFill>
                 <a:latin typeface="Pragmatica" panose="020B0403040502020204" pitchFamily="34" charset="0"/>
               </a:rPr>
-              <a:t>Power Query → Automated data prep</a:t>
+              <a:t>Power Query → but one cleanup isn’t a pipeline</a:t>
             </a:r>
           </a:p>
           <a:p>
@@ -11240,14 +11660,14 @@
                 </a:solidFill>
                 <a:latin typeface="Pragmatica" panose="020B0403040502020204" pitchFamily="34" charset="0"/>
               </a:rPr>
-              <a:t>Analyze Data → Instant insights</a:t>
+              <a:t>Analyze Data → but quick insights aren’t repeatable</a:t>
             </a:r>
           </a:p>
         </p:txBody>
       </p:sp>
       <p:pic>
         <p:nvPicPr>
-          <p:cNvPr id="15" name="Picture 14" descr="A close up of a sign&#10;&#10;Description automatically generated">
+          <p:cNvPr id="15" name="Picture 14" descr="A close up of a sign  Description automatically generated">
             <a:extLst>
               <a:ext uri="{FF2B5EF4-FFF2-40B4-BE49-F238E27FC236}">
                 <a16:creationId xmlns:a16="http://schemas.microsoft.com/office/drawing/2014/main" id="{C54442A3-1184-472E-336C-0DB56D7A71D5}"/>

--- a/modern-excel-demo-day.pptx
+++ b/modern-excel-demo-day.pptx
@@ -913,7 +913,7 @@
     <dgm:pt modelId="{68798DD1-6FC4-4C34-9F3F-53BBEB998853}" type="doc">
       <dgm:prSet loTypeId="urn:microsoft.com/office/officeart/2005/8/layout/chevron2" loCatId="process" qsTypeId="urn:microsoft.com/office/officeart/2005/8/quickstyle/simple1" qsCatId="simple" csTypeId="urn:microsoft.com/office/officeart/2005/8/colors/accent1_2" csCatId="accent1" phldr="1"/>
       <dgm:spPr/>
-      <dgm:t xml:space="preserve">
+      <dgm:t>
         <a:bodyPr/>
         <a:lstStyle/>
         <a:p>
@@ -928,7 +928,7 @@
           <a:srgbClr val="C00000"/>
         </a:solidFill>
       </dgm:spPr>
-      <dgm:t xml:space="preserve">
+      <dgm:t>
         <a:bodyPr/>
         <a:lstStyle/>
         <a:p>
@@ -942,7 +942,7 @@
     <dgm:pt modelId="{FF3D7B0C-E2C4-49B8-8C4B-AF120BF1E2B9}" type="parTrans" cxnId="{6C0172DF-D88B-41D4-B3F5-CA15E159222B}">
       <dgm:prSet/>
       <dgm:spPr/>
-      <dgm:t xml:space="preserve">
+      <dgm:t>
         <a:bodyPr/>
         <a:lstStyle/>
         <a:p>
@@ -953,7 +953,7 @@
     <dgm:pt modelId="{969895C4-5161-439F-BA5B-C7930ADA9517}" type="sibTrans" cxnId="{6C0172DF-D88B-41D4-B3F5-CA15E159222B}">
       <dgm:prSet/>
       <dgm:spPr/>
-      <dgm:t xml:space="preserve">
+      <dgm:t>
         <a:bodyPr/>
         <a:lstStyle/>
         <a:p>
@@ -972,7 +972,7 @@
           </a:solidFill>
         </a:ln>
       </dgm:spPr>
-      <dgm:t xml:space="preserve">
+      <dgm:t>
         <a:bodyPr/>
         <a:lstStyle/>
         <a:p>
@@ -986,7 +986,7 @@
     <dgm:pt modelId="{C97A6C3A-9B27-45E4-8D96-A0B3EE805D38}" type="parTrans" cxnId="{6C6CBB06-B18A-42AC-8E9C-1FECB4298C8E}">
       <dgm:prSet/>
       <dgm:spPr/>
-      <dgm:t xml:space="preserve">
+      <dgm:t>
         <a:bodyPr/>
         <a:lstStyle/>
         <a:p>
@@ -997,7 +997,7 @@
     <dgm:pt modelId="{95B33339-D74D-43E7-BBDD-70E0EB607FD8}" type="sibTrans" cxnId="{6C6CBB06-B18A-42AC-8E9C-1FECB4298C8E}">
       <dgm:prSet/>
       <dgm:spPr/>
-      <dgm:t xml:space="preserve">
+      <dgm:t>
         <a:bodyPr/>
         <a:lstStyle/>
         <a:p>
@@ -1016,7 +1016,7 @@
           </a:solidFill>
         </a:ln>
       </dgm:spPr>
-      <dgm:t xml:space="preserve">
+      <dgm:t>
         <a:bodyPr/>
         <a:lstStyle/>
         <a:p>
@@ -1030,7 +1030,7 @@
     <dgm:pt modelId="{88E2D7DD-A20A-4D82-B7BA-495E3CA5520E}" type="parTrans" cxnId="{08744D63-46D0-44D2-900A-8851AAD8CEA3}">
       <dgm:prSet/>
       <dgm:spPr/>
-      <dgm:t xml:space="preserve">
+      <dgm:t>
         <a:bodyPr/>
         <a:lstStyle/>
         <a:p>
@@ -1041,7 +1041,7 @@
     <dgm:pt modelId="{EFC160FF-009E-419D-9011-2FCCED5BFCAE}" type="sibTrans" cxnId="{08744D63-46D0-44D2-900A-8851AAD8CEA3}">
       <dgm:prSet/>
       <dgm:spPr/>
-      <dgm:t xml:space="preserve">
+      <dgm:t>
         <a:bodyPr/>
         <a:lstStyle/>
         <a:p>
@@ -1060,7 +1060,7 @@
           </a:solidFill>
         </a:ln>
       </dgm:spPr>
-      <dgm:t xml:space="preserve">
+      <dgm:t>
         <a:bodyPr/>
         <a:lstStyle/>
         <a:p>
@@ -1074,7 +1074,7 @@
     <dgm:pt modelId="{BDE34EB0-9E1B-4FF4-9FC7-70742D76E4E6}" type="parTrans" cxnId="{9453C970-A133-42A1-BB1A-7672CEFA0687}">
       <dgm:prSet/>
       <dgm:spPr/>
-      <dgm:t xml:space="preserve">
+      <dgm:t>
         <a:bodyPr/>
         <a:lstStyle/>
         <a:p>
@@ -1085,7 +1085,7 @@
     <dgm:pt modelId="{45E94802-E21A-4AC8-ACCB-FA38B41DCB9F}" type="sibTrans" cxnId="{9453C970-A133-42A1-BB1A-7672CEFA0687}">
       <dgm:prSet/>
       <dgm:spPr/>
-      <dgm:t xml:space="preserve">
+      <dgm:t>
         <a:bodyPr/>
         <a:lstStyle/>
         <a:p>
@@ -1100,7 +1100,7 @@
           <a:srgbClr val="C00000"/>
         </a:solidFill>
       </dgm:spPr>
-      <dgm:t xml:space="preserve">
+      <dgm:t>
         <a:bodyPr/>
         <a:lstStyle/>
         <a:p>
@@ -1114,7 +1114,7 @@
     <dgm:pt modelId="{2EE0B6F5-6A8E-418F-9567-1907B2738A34}" type="parTrans" cxnId="{BC96F6EE-A452-4FD1-957C-3C61D63DF19A}">
       <dgm:prSet/>
       <dgm:spPr/>
-      <dgm:t xml:space="preserve">
+      <dgm:t>
         <a:bodyPr/>
         <a:lstStyle/>
         <a:p>
@@ -1125,7 +1125,7 @@
     <dgm:pt modelId="{E09FC7D4-5B56-4C5F-893B-848769202938}" type="sibTrans" cxnId="{BC96F6EE-A452-4FD1-957C-3C61D63DF19A}">
       <dgm:prSet/>
       <dgm:spPr/>
-      <dgm:t xml:space="preserve">
+      <dgm:t>
         <a:bodyPr/>
         <a:lstStyle/>
         <a:p>
@@ -1144,7 +1144,7 @@
           </a:solidFill>
         </a:ln>
       </dgm:spPr>
-      <dgm:t xml:space="preserve">
+      <dgm:t>
         <a:bodyPr/>
         <a:lstStyle/>
         <a:p>
@@ -1158,7 +1158,7 @@
     <dgm:pt modelId="{C7A141B3-2B9C-4F4D-9D07-5F119890BE56}" type="parTrans" cxnId="{E39F6071-D189-4302-81C2-C8D5AD0A841D}">
       <dgm:prSet/>
       <dgm:spPr/>
-      <dgm:t xml:space="preserve">
+      <dgm:t>
         <a:bodyPr/>
         <a:lstStyle/>
         <a:p>
@@ -1169,7 +1169,7 @@
     <dgm:pt modelId="{BF1D4A6B-4EBA-4D46-93B3-07C66BF920A8}" type="sibTrans" cxnId="{E39F6071-D189-4302-81C2-C8D5AD0A841D}">
       <dgm:prSet/>
       <dgm:spPr/>
-      <dgm:t xml:space="preserve">
+      <dgm:t>
         <a:bodyPr/>
         <a:lstStyle/>
         <a:p>
@@ -1188,7 +1188,7 @@
           </a:solidFill>
         </a:ln>
       </dgm:spPr>
-      <dgm:t xml:space="preserve">
+      <dgm:t>
         <a:bodyPr/>
         <a:lstStyle/>
         <a:p>
@@ -1202,7 +1202,7 @@
     <dgm:pt modelId="{DF6760EA-CD03-4B40-8B21-BE7EBE5C8B51}" type="parTrans" cxnId="{D544EC0C-557D-4137-BBE5-D7047405AD61}">
       <dgm:prSet/>
       <dgm:spPr/>
-      <dgm:t xml:space="preserve">
+      <dgm:t>
         <a:bodyPr/>
         <a:lstStyle/>
         <a:p>
@@ -1213,7 +1213,7 @@
     <dgm:pt modelId="{56F627CE-8FDB-492D-9146-C96F55B7E1C0}" type="sibTrans" cxnId="{D544EC0C-557D-4137-BBE5-D7047405AD61}">
       <dgm:prSet/>
       <dgm:spPr/>
-      <dgm:t xml:space="preserve">
+      <dgm:t>
         <a:bodyPr/>
         <a:lstStyle/>
         <a:p>
@@ -1232,7 +1232,7 @@
           </a:solidFill>
         </a:ln>
       </dgm:spPr>
-      <dgm:t xml:space="preserve">
+      <dgm:t>
         <a:bodyPr/>
         <a:lstStyle/>
         <a:p>
@@ -1246,7 +1246,7 @@
     <dgm:pt modelId="{23C95D64-ACDF-4793-AF7E-ADB56BE2841D}" type="parTrans" cxnId="{1C3620EC-CE2A-437B-813B-D62505EEF778}">
       <dgm:prSet/>
       <dgm:spPr/>
-      <dgm:t xml:space="preserve">
+      <dgm:t>
         <a:bodyPr/>
         <a:lstStyle/>
         <a:p>
@@ -1257,7 +1257,7 @@
     <dgm:pt modelId="{98F84862-E132-4EA1-89ED-AC172F965CF6}" type="sibTrans" cxnId="{1C3620EC-CE2A-437B-813B-D62505EEF778}">
       <dgm:prSet/>
       <dgm:spPr/>
-      <dgm:t xml:space="preserve">
+      <dgm:t>
         <a:bodyPr/>
         <a:lstStyle/>
         <a:p>
@@ -1272,7 +1272,7 @@
           <a:srgbClr val="C00000"/>
         </a:solidFill>
       </dgm:spPr>
-      <dgm:t xml:space="preserve">
+      <dgm:t>
         <a:bodyPr/>
         <a:lstStyle/>
         <a:p>
@@ -1286,7 +1286,7 @@
     <dgm:pt modelId="{85C43083-FDDC-4EB5-8CA2-AF1A2A539AE5}" type="parTrans" cxnId="{F5A0ED73-185C-43A4-B087-39723A0B16D0}">
       <dgm:prSet/>
       <dgm:spPr/>
-      <dgm:t xml:space="preserve">
+      <dgm:t>
         <a:bodyPr/>
         <a:lstStyle/>
         <a:p>
@@ -1297,7 +1297,7 @@
     <dgm:pt modelId="{C9BD2B50-714A-4AF3-9879-8E0D2682421F}" type="sibTrans" cxnId="{F5A0ED73-185C-43A4-B087-39723A0B16D0}">
       <dgm:prSet/>
       <dgm:spPr/>
-      <dgm:t xml:space="preserve">
+      <dgm:t>
         <a:bodyPr/>
         <a:lstStyle/>
         <a:p>
@@ -1316,7 +1316,7 @@
           </a:solidFill>
         </a:ln>
       </dgm:spPr>
-      <dgm:t xml:space="preserve">
+      <dgm:t>
         <a:bodyPr/>
         <a:lstStyle/>
         <a:p>
@@ -1330,7 +1330,7 @@
     <dgm:pt modelId="{58151A2E-80AA-4AD6-A185-C0F5E8DA47AD}" type="parTrans" cxnId="{B62C6E92-AB91-468B-B358-EDF92131A7AF}">
       <dgm:prSet/>
       <dgm:spPr/>
-      <dgm:t xml:space="preserve">
+      <dgm:t>
         <a:bodyPr/>
         <a:lstStyle/>
         <a:p>
@@ -1341,7 +1341,7 @@
     <dgm:pt modelId="{CBE4C6D7-AAFF-485C-A9FE-75A1ADEB00AD}" type="sibTrans" cxnId="{B62C6E92-AB91-468B-B358-EDF92131A7AF}">
       <dgm:prSet/>
       <dgm:spPr/>
-      <dgm:t xml:space="preserve">
+      <dgm:t>
         <a:bodyPr/>
         <a:lstStyle/>
         <a:p>
@@ -1360,7 +1360,7 @@
           </a:solidFill>
         </a:ln>
       </dgm:spPr>
-      <dgm:t xml:space="preserve">
+      <dgm:t>
         <a:bodyPr/>
         <a:lstStyle/>
         <a:p>
@@ -1374,7 +1374,7 @@
     <dgm:pt modelId="{ACD5A1DA-F5CD-48CE-B171-EC32505DF8B8}" type="parTrans" cxnId="{529891CA-70A8-4B23-B19B-BE2328CC8E28}">
       <dgm:prSet/>
       <dgm:spPr/>
-      <dgm:t xml:space="preserve">
+      <dgm:t>
         <a:bodyPr/>
         <a:lstStyle/>
         <a:p>
@@ -1385,7 +1385,7 @@
     <dgm:pt modelId="{6ACADE56-6832-41F1-9403-24B505942BF3}" type="sibTrans" cxnId="{529891CA-70A8-4B23-B19B-BE2328CC8E28}">
       <dgm:prSet/>
       <dgm:spPr/>
-      <dgm:t xml:space="preserve">
+      <dgm:t>
         <a:bodyPr/>
         <a:lstStyle/>
         <a:p>
@@ -1404,13 +1404,13 @@
           </a:solidFill>
         </a:ln>
       </dgm:spPr>
-      <dgm:t xml:space="preserve">
+      <dgm:t>
         <a:bodyPr/>
         <a:lstStyle/>
         <a:p>
           <a:r>
             <a:rPr lang="en-US" dirty="0"/>
-            <a:t xml:space="preserve">Internal ownership of reliable, </a:t>
+            <a:t>Internal ownership of reliable, </a:t>
           </a:r>
           <a:r>
             <a:rPr lang="en-US"/>
@@ -1423,7 +1423,7 @@
     <dgm:pt modelId="{F3950239-A916-4097-A7B6-DDA6653C9CB5}" type="parTrans" cxnId="{862989A2-6D7C-42A4-A92A-2FD429FB0840}">
       <dgm:prSet/>
       <dgm:spPr/>
-      <dgm:t xml:space="preserve">
+      <dgm:t>
         <a:bodyPr/>
         <a:lstStyle/>
         <a:p>
@@ -1434,7 +1434,7 @@
     <dgm:pt modelId="{63E1678F-6B99-4762-B916-5E63C98E7666}" type="sibTrans" cxnId="{862989A2-6D7C-42A4-A92A-2FD429FB0840}">
       <dgm:prSet/>
       <dgm:spPr/>
-      <dgm:t xml:space="preserve">
+      <dgm:t>
         <a:bodyPr/>
         <a:lstStyle/>
         <a:p>
@@ -2122,7 +2122,7 @@
           </a:pPr>
           <a:r>
             <a:rPr lang="en-US" sz="3200" kern="1200" dirty="0"/>
-            <a:t xml:space="preserve">Internal ownership of reliable, </a:t>
+            <a:t>Internal ownership of reliable, </a:t>
           </a:r>
           <a:r>
             <a:rPr lang="en-US" sz="3200" kern="1200"/>
@@ -3512,7 +3512,7 @@
           <a:p>
             <a:fld id="{17A98A70-FA8C-4354-959C-C70678AC9BCF}" type="datetimeFigureOut">
               <a:rPr lang="en-US" smtClean="0"/>
-              <a:t>1/29/2026</a:t>
+              <a:t>5/26/2026</a:t>
             </a:fld>
             <a:endParaRPr lang="en-US"/>
           </a:p>
@@ -3909,7 +3909,19 @@
           <a:p>
             <a:r>
               <a:rPr lang="en-US" dirty="0"/>
-              <a:t>All of this is free and I mean it. I publish regularly, it’s substantive, and it’s not gated behind anything. If free is where you want to stay, I’m genuinely fine with that.</a:t>
+              <a:t>If you got value from today and you want to keep going — not just watch another demo in six months, but actually build the full pipeline we talked about — the Modern Excel AI Stack is where that happens. It’s a membership, not a big course. You get ongoing guidance as tools change, and you’re not starting from scratch every time Microsoft ships something new.</a:t>
+            </a:r>
+          </a:p>
+          <a:p>
+            <a:r>
+              <a:rPr lang="en-US" dirty="0"/>
+              <a:t>If you want to go deep on one specific topic, I have standalone courses like Python in Excel: Quick Wins. If you prefer self-paced, my LinkedIn Learning courses are designed to be clear and sequenced. If you want live, hands-on training, that’s what my O’Reilly sessions and Eventbrite workshops are for.</a:t>
+            </a:r>
+          </a:p>
+          <a:p>
+            <a:r>
+              <a:rPr lang="en-US" dirty="0"/>
+              <a:t>And if you’re a manager or team lead and you’re thinking “my whole team needs this,” book a discovery call. That link is on the slide.</a:t>
             </a:r>
           </a:p>
         </p:txBody>
@@ -3929,15 +3941,20 @@
           <a:bodyPr/>
           <a:lstStyle/>
           <a:p>
-            <a:fld id="{1300335D-9F13-4B80-ADC5-B0EA3E10FF6B}" type="slidenum">
+            <a:fld id="{FFB500C5-13F7-48FC-8160-C29AECF6C602}" type="slidenum">
               <a:rPr lang="en-US" smtClean="0"/>
-              <a:t>10</a:t>
+              <a:t>13</a:t>
             </a:fld>
             <a:endParaRPr lang="en-US"/>
           </a:p>
         </p:txBody>
       </p:sp>
     </p:spTree>
+    <p:extLst>
+      <p:ext uri="{BB962C8B-B14F-4D97-AF65-F5344CB8AC3E}">
+        <p14:creationId xmlns:p14="http://schemas.microsoft.com/office/powerpoint/2010/main" val="1958501508"/>
+      </p:ext>
+    </p:extLst>
   </p:cSld>
   <p:clrMapOvr>
     <a:masterClrMapping/>
@@ -4552,13 +4569,31 @@
           <a:p>
             <a:r>
               <a:rPr lang="en-US" dirty="0"/>
-              <a:t>You just saw three genuinely useful things. And you could absolutely go home and use all of them tomorrow. But here’s what I’ve seen happen hundreds of times: someone watches a demo like this, tries it on Monday, hits a snag that wasn’t in the demo, Googles around for 45 minutes, gets a partial answer, and moves on. Two weeks later they’re back to doing it the old way.</a:t>
+              <a:t>Those three things are genuinely useful and you can use them tomorrow. But I’d be doing you a disservice if I pretended that’s the whole story.</a:t>
             </a:r>
           </a:p>
           <a:p>
             <a:r>
               <a:rPr lang="en-US" dirty="0"/>
-              <a:t>Free content — including today — is great at showing you what’s possible. What it can’t do is hold your hand through the messy middle when your actual data doesn’t look like the demo data. That’s not a flaw in the content. It’s just the nature of free. If you’re here for the third or fourth time and still feel stuck, that’s not a failure — it’s a signal that you need structure, not more content.</a:t>
+              <a:t>Tables give you structure — but a table sitting by itself is still flat. You can’t relate it to other data, you can’t build measures on top of it, you can’t answer questions that span multiple datasets. For that you need the Data Model, and most people never get there.</a:t>
+            </a:r>
+          </a:p>
+          <a:p>
+            <a:r>
+              <a:rPr lang="en-US" dirty="0"/>
+              <a:t>Power Query cleaned your data beautifully — once. But what happens next month when the source file changes format? Or when you need to merge five files instead of one? Or when someone asks why your numbers don’t match finance’s report? One cleanup is not a pipeline. A pipeline is something that runs reliably every time without you babysitting it.</a:t>
+            </a:r>
+          </a:p>
+          <a:p>
+            <a:r>
+              <a:rPr lang="en-US" dirty="0"/>
+              <a:t>Analyze Data gave you quick insights — but they’re gone the moment you close the pane. There’s no saved analysis. No audit trail. No way to hand it to a colleague and say “here, run this again next quarter.” Quick insights are great for exploration, but they’re not how you make decisions you can defend.</a:t>
+            </a:r>
+          </a:p>
+          <a:p>
+            <a:r>
+              <a:rPr lang="en-US" dirty="0"/>
+              <a:t>Each of these is step one of a longer process. And the gap between step one and a reliable workflow is where most people get stuck and give up.</a:t>
             </a:r>
           </a:p>
         </p:txBody>
@@ -4578,20 +4613,15 @@
           <a:bodyPr/>
           <a:lstStyle/>
           <a:p>
-            <a:fld id="{FFB500C5-13F7-48FC-8160-C29AECF6C602}" type="slidenum">
+            <a:fld id="{1300335D-9F13-4B80-ADC5-B0EA3E10FF6B}" type="slidenum">
               <a:rPr lang="en-US" smtClean="0"/>
-              <a:t>11</a:t>
+              <a:t>8</a:t>
             </a:fld>
             <a:endParaRPr lang="en-US"/>
           </a:p>
         </p:txBody>
       </p:sp>
     </p:spTree>
-    <p:extLst>
-      <p:ext uri="{BB962C8B-B14F-4D97-AF65-F5344CB8AC3E}">
-        <p14:creationId xmlns:p14="http://schemas.microsoft.com/office/powerpoint/2010/main" val="1824193319"/>
-      </p:ext>
-    </p:extLst>
   </p:cSld>
   <p:clrMapOvr>
     <a:masterClrMapping/>
@@ -4645,25 +4675,7 @@
           <a:p>
             <a:r>
               <a:rPr lang="en-US" dirty="0"/>
-              <a:t>I work with individuals, teams, and organizations at different levels, but the philosophy is always the same: reduce chaos, increase clarity, and build workflows that actually hold up over time.</a:t>
-            </a:r>
-          </a:p>
-          <a:p>
-            <a:r>
-              <a:rPr lang="en-US" dirty="0"/>
-              <a:t>For individuals, this usually means self-paced courses or live workshops focused not just on learning features, but on developing judgment — understanding when to use formulas, Power Query, Python, or Copilot, and when not to.</a:t>
-            </a:r>
-          </a:p>
-          <a:p>
-            <a:r>
-              <a:rPr lang="en-US" dirty="0"/>
-              <a:t>With teams, the work becomes more applied and workflow-driven — practical corporate training that helps reduce errors, rework, and fragile one-off fixes by applying modern Excel patterns to real business processes.</a:t>
-            </a:r>
-          </a:p>
-          <a:p>
-            <a:r>
-              <a:rPr lang="en-US" dirty="0"/>
-              <a:t>At the organizational level, this often takes the form of a guided, multi-week modernization program where teams learn to build pipelines, automation, and documentation around Excel-based systems.</a:t>
+              <a:t>I want to give you a clear picture of everything I offer so you can decide what’s right for you. I’m not going to be coy about the fact that I have paid offerings. I think you deserve to know what exists.</a:t>
             </a:r>
           </a:p>
         </p:txBody>
@@ -4683,20 +4695,15 @@
           <a:bodyPr/>
           <a:lstStyle/>
           <a:p>
-            <a:fld id="{1053C468-B4D7-40C4-885B-735937C382A2}" type="slidenum">
+            <a:fld id="{1300335D-9F13-4B80-ADC5-B0EA3E10FF6B}" type="slidenum">
               <a:rPr lang="en-US" smtClean="0"/>
-              <a:t>12</a:t>
+              <a:t>9</a:t>
             </a:fld>
             <a:endParaRPr lang="en-US"/>
           </a:p>
         </p:txBody>
       </p:sp>
     </p:spTree>
-    <p:extLst>
-      <p:ext uri="{BB962C8B-B14F-4D97-AF65-F5344CB8AC3E}">
-        <p14:creationId xmlns:p14="http://schemas.microsoft.com/office/powerpoint/2010/main" val="4122893634"/>
-      </p:ext>
-    </p:extLst>
   </p:cSld>
   <p:clrMapOvr>
     <a:masterClrMapping/>
@@ -4750,19 +4757,7 @@
           <a:p>
             <a:r>
               <a:rPr lang="en-US" dirty="0"/>
-              <a:t>If you got value from today and you want to keep going — not just watch another demo in six months, but actually build the full pipeline we talked about — the Modern Excel AI Stack is where that happens. It’s a membership, not a big course. You get ongoing guidance as tools change, and you’re not starting from scratch every time Microsoft ships something new.</a:t>
-            </a:r>
-          </a:p>
-          <a:p>
-            <a:r>
-              <a:rPr lang="en-US" dirty="0"/>
-              <a:t>If you want to go deep on one specific topic, I have standalone courses like Python in Excel: Quick Wins. If you prefer self-paced, my LinkedIn Learning courses are designed to be clear and sequenced. If you want live, hands-on training, that’s what my O’Reilly sessions and Eventbrite workshops are for.</a:t>
-            </a:r>
-          </a:p>
-          <a:p>
-            <a:r>
-              <a:rPr lang="en-US" dirty="0"/>
-              <a:t>And if you’re a manager or team lead and you’re thinking “my whole team needs this,” book a discovery call. That link is on the slide.</a:t>
+              <a:t>All of this is free and I mean it. I publish regularly, it’s substantive, and it’s not gated behind anything. If free is where you want to stay, I’m genuinely fine with that.</a:t>
             </a:r>
           </a:p>
         </p:txBody>
@@ -4782,20 +4777,15 @@
           <a:bodyPr/>
           <a:lstStyle/>
           <a:p>
-            <a:fld id="{FFB500C5-13F7-48FC-8160-C29AECF6C602}" type="slidenum">
+            <a:fld id="{1300335D-9F13-4B80-ADC5-B0EA3E10FF6B}" type="slidenum">
               <a:rPr lang="en-US" smtClean="0"/>
-              <a:t>13</a:t>
+              <a:t>10</a:t>
             </a:fld>
             <a:endParaRPr lang="en-US"/>
           </a:p>
         </p:txBody>
       </p:sp>
     </p:spTree>
-    <p:extLst>
-      <p:ext uri="{BB962C8B-B14F-4D97-AF65-F5344CB8AC3E}">
-        <p14:creationId xmlns:p14="http://schemas.microsoft.com/office/powerpoint/2010/main" val="1958501508"/>
-      </p:ext>
-    </p:extLst>
   </p:cSld>
   <p:clrMapOvr>
     <a:masterClrMapping/>
@@ -4849,31 +4839,13 @@
           <a:p>
             <a:r>
               <a:rPr lang="en-US" dirty="0"/>
-              <a:t>Those three things are genuinely useful and you can use them tomorrow. But I’d be doing you a disservice if I pretended that’s the whole story.</a:t>
+              <a:t>You just saw three genuinely useful things. And you could absolutely go home and use all of them tomorrow. But here’s what I’ve seen happen hundreds of times: someone watches a demo like this, tries it on Monday, hits a snag that wasn’t in the demo, Googles around for 45 minutes, gets a partial answer, and moves on. Two weeks later they’re back to doing it the old way.</a:t>
             </a:r>
           </a:p>
           <a:p>
             <a:r>
               <a:rPr lang="en-US" dirty="0"/>
-              <a:t>Tables give you structure — but a table sitting by itself is still flat. You can’t relate it to other data, you can’t build measures on top of it, you can’t answer questions that span multiple datasets. For that you need the Data Model, and most people never get there.</a:t>
-            </a:r>
-          </a:p>
-          <a:p>
-            <a:r>
-              <a:rPr lang="en-US" dirty="0"/>
-              <a:t>Power Query cleaned your data beautifully — once. But what happens next month when the source file changes format? Or when you need to merge five files instead of one? Or when someone asks why your numbers don’t match finance’s report? One cleanup is not a pipeline. A pipeline is something that runs reliably every time without you babysitting it.</a:t>
-            </a:r>
-          </a:p>
-          <a:p>
-            <a:r>
-              <a:rPr lang="en-US" dirty="0"/>
-              <a:t>Analyze Data gave you quick insights — but they’re gone the moment you close the pane. There’s no saved analysis. No audit trail. No way to hand it to a colleague and say “here, run this again next quarter.” Quick insights are great for exploration, but they’re not how you make decisions you can defend.</a:t>
-            </a:r>
-          </a:p>
-          <a:p>
-            <a:r>
-              <a:rPr lang="en-US" dirty="0"/>
-              <a:t>Each of these is step one of a longer process. And the gap between step one and a reliable workflow is where most people get stuck and give up.</a:t>
+              <a:t>Free content — including today — is great at showing you what’s possible. What it can’t do is hold your hand through the messy middle when your actual data doesn’t look like the demo data. That’s not a flaw in the content. It’s just the nature of free. If you’re here for the third or fourth time and still feel stuck, that’s not a failure — it’s a signal that you need structure, not more content.</a:t>
             </a:r>
           </a:p>
         </p:txBody>
@@ -4893,15 +4865,20 @@
           <a:bodyPr/>
           <a:lstStyle/>
           <a:p>
-            <a:fld id="{1300335D-9F13-4B80-ADC5-B0EA3E10FF6B}" type="slidenum">
+            <a:fld id="{FFB500C5-13F7-48FC-8160-C29AECF6C602}" type="slidenum">
               <a:rPr lang="en-US" smtClean="0"/>
-              <a:t>8</a:t>
+              <a:t>11</a:t>
             </a:fld>
             <a:endParaRPr lang="en-US"/>
           </a:p>
         </p:txBody>
       </p:sp>
     </p:spTree>
+    <p:extLst>
+      <p:ext uri="{BB962C8B-B14F-4D97-AF65-F5344CB8AC3E}">
+        <p14:creationId xmlns:p14="http://schemas.microsoft.com/office/powerpoint/2010/main" val="1824193319"/>
+      </p:ext>
+    </p:extLst>
   </p:cSld>
   <p:clrMapOvr>
     <a:masterClrMapping/>
@@ -4955,7 +4932,25 @@
           <a:p>
             <a:r>
               <a:rPr lang="en-US" dirty="0"/>
-              <a:t>I want to give you a clear picture of everything I offer so you can decide what’s right for you. I’m not going to be coy about the fact that I have paid offerings. I think you deserve to know what exists.</a:t>
+              <a:t>I work with individuals, teams, and organizations at different levels, but the philosophy is always the same: reduce chaos, increase clarity, and build workflows that actually hold up over time.</a:t>
+            </a:r>
+          </a:p>
+          <a:p>
+            <a:r>
+              <a:rPr lang="en-US" dirty="0"/>
+              <a:t>For individuals, this usually means self-paced courses or live workshops focused not just on learning features, but on developing judgment — understanding when to use formulas, Power Query, Python, or Copilot, and when not to.</a:t>
+            </a:r>
+          </a:p>
+          <a:p>
+            <a:r>
+              <a:rPr lang="en-US" dirty="0"/>
+              <a:t>With teams, the work becomes more applied and workflow-driven — practical corporate training that helps reduce errors, rework, and fragile one-off fixes by applying modern Excel patterns to real business processes.</a:t>
+            </a:r>
+          </a:p>
+          <a:p>
+            <a:r>
+              <a:rPr lang="en-US" dirty="0"/>
+              <a:t>At the organizational level, this often takes the form of a guided, multi-week modernization program where teams learn to build pipelines, automation, and documentation around Excel-based systems.</a:t>
             </a:r>
           </a:p>
         </p:txBody>
@@ -4975,15 +4970,20 @@
           <a:bodyPr/>
           <a:lstStyle/>
           <a:p>
-            <a:fld id="{1300335D-9F13-4B80-ADC5-B0EA3E10FF6B}" type="slidenum">
+            <a:fld id="{1053C468-B4D7-40C4-885B-735937C382A2}" type="slidenum">
               <a:rPr lang="en-US" smtClean="0"/>
-              <a:t>9</a:t>
+              <a:t>12</a:t>
             </a:fld>
             <a:endParaRPr lang="en-US"/>
           </a:p>
         </p:txBody>
       </p:sp>
     </p:spTree>
+    <p:extLst>
+      <p:ext uri="{BB962C8B-B14F-4D97-AF65-F5344CB8AC3E}">
+        <p14:creationId xmlns:p14="http://schemas.microsoft.com/office/powerpoint/2010/main" val="4122893634"/>
+      </p:ext>
+    </p:extLst>
   </p:cSld>
   <p:clrMapOvr>
     <a:masterClrMapping/>
@@ -5171,7 +5171,7 @@
             <a:fld id="{1D8BD707-D9CF-40AE-B4C6-C98DA3205C09}" type="datetimeFigureOut">
               <a:rPr lang="en-US" smtClean="0"/>
               <a:pPr/>
-              <a:t>1/29/2026</a:t>
+              <a:t>5/26/2026</a:t>
             </a:fld>
             <a:endParaRPr lang="en-US"/>
           </a:p>
@@ -5336,7 +5336,7 @@
             <a:fld id="{1D8BD707-D9CF-40AE-B4C6-C98DA3205C09}" type="datetimeFigureOut">
               <a:rPr lang="en-US" smtClean="0"/>
               <a:pPr/>
-              <a:t>1/29/2026</a:t>
+              <a:t>5/26/2026</a:t>
             </a:fld>
             <a:endParaRPr lang="en-US"/>
           </a:p>
@@ -5511,7 +5511,7 @@
             <a:fld id="{1D8BD707-D9CF-40AE-B4C6-C98DA3205C09}" type="datetimeFigureOut">
               <a:rPr lang="en-US" smtClean="0"/>
               <a:pPr/>
-              <a:t>1/29/2026</a:t>
+              <a:t>5/26/2026</a:t>
             </a:fld>
             <a:endParaRPr lang="en-US"/>
           </a:p>
@@ -5676,7 +5676,7 @@
             <a:fld id="{1D8BD707-D9CF-40AE-B4C6-C98DA3205C09}" type="datetimeFigureOut">
               <a:rPr lang="en-US" smtClean="0"/>
               <a:pPr/>
-              <a:t>1/29/2026</a:t>
+              <a:t>5/26/2026</a:t>
             </a:fld>
             <a:endParaRPr lang="en-US"/>
           </a:p>
@@ -5918,7 +5918,7 @@
             <a:fld id="{1D8BD707-D9CF-40AE-B4C6-C98DA3205C09}" type="datetimeFigureOut">
               <a:rPr lang="en-US" smtClean="0"/>
               <a:pPr/>
-              <a:t>1/29/2026</a:t>
+              <a:t>5/26/2026</a:t>
             </a:fld>
             <a:endParaRPr lang="en-US"/>
           </a:p>
@@ -6200,7 +6200,7 @@
             <a:fld id="{1D8BD707-D9CF-40AE-B4C6-C98DA3205C09}" type="datetimeFigureOut">
               <a:rPr lang="en-US" smtClean="0"/>
               <a:pPr/>
-              <a:t>1/29/2026</a:t>
+              <a:t>5/26/2026</a:t>
             </a:fld>
             <a:endParaRPr lang="en-US"/>
           </a:p>
@@ -6616,7 +6616,7 @@
             <a:fld id="{1D8BD707-D9CF-40AE-B4C6-C98DA3205C09}" type="datetimeFigureOut">
               <a:rPr lang="en-US" smtClean="0"/>
               <a:pPr/>
-              <a:t>1/29/2026</a:t>
+              <a:t>5/26/2026</a:t>
             </a:fld>
             <a:endParaRPr lang="en-US"/>
           </a:p>
@@ -6730,7 +6730,7 @@
             <a:fld id="{1D8BD707-D9CF-40AE-B4C6-C98DA3205C09}" type="datetimeFigureOut">
               <a:rPr lang="en-US" smtClean="0"/>
               <a:pPr/>
-              <a:t>1/29/2026</a:t>
+              <a:t>5/26/2026</a:t>
             </a:fld>
             <a:endParaRPr lang="en-US"/>
           </a:p>
@@ -6822,7 +6822,7 @@
             <a:fld id="{1D8BD707-D9CF-40AE-B4C6-C98DA3205C09}" type="datetimeFigureOut">
               <a:rPr lang="en-US" smtClean="0"/>
               <a:pPr/>
-              <a:t>1/29/2026</a:t>
+              <a:t>5/26/2026</a:t>
             </a:fld>
             <a:endParaRPr lang="en-US"/>
           </a:p>
@@ -7094,7 +7094,7 @@
             <a:fld id="{1D8BD707-D9CF-40AE-B4C6-C98DA3205C09}" type="datetimeFigureOut">
               <a:rPr lang="en-US" smtClean="0"/>
               <a:pPr/>
-              <a:t>1/29/2026</a:t>
+              <a:t>5/26/2026</a:t>
             </a:fld>
             <a:endParaRPr lang="en-US"/>
           </a:p>
@@ -7343,7 +7343,7 @@
             <a:fld id="{1D8BD707-D9CF-40AE-B4C6-C98DA3205C09}" type="datetimeFigureOut">
               <a:rPr lang="en-US" smtClean="0"/>
               <a:pPr/>
-              <a:t>1/29/2026</a:t>
+              <a:t>5/26/2026</a:t>
             </a:fld>
             <a:endParaRPr lang="en-US"/>
           </a:p>
@@ -7556,7 +7556,7 @@
             <a:fld id="{1D8BD707-D9CF-40AE-B4C6-C98DA3205C09}" type="datetimeFigureOut">
               <a:rPr lang="en-US" smtClean="0"/>
               <a:pPr/>
-              <a:t>1/29/2026</a:t>
+              <a:t>5/26/2026</a:t>
             </a:fld>
             <a:endParaRPr lang="en-US"/>
           </a:p>
@@ -8186,7 +8186,7 @@
                 </a:solidFill>
                 <a:latin typeface="Pragmatica" panose="020B0403040502020204" pitchFamily="34" charset="0"/>
               </a:rPr>
-              <a:t xml:space="preserve">Blog: </a:t>
+              <a:t>Blog: </a:t>
             </a:r>
             <a:r>
               <a:rPr lang="en-US" sz="6000" dirty="0">
@@ -8194,7 +8194,7 @@
                   <a:srgbClr val="CF3338"/>
                 </a:solidFill>
                 <a:latin typeface="Pragmatica" panose="020B0403040502020204" pitchFamily="34" charset="0"/>
-                <a:hlinkClick r:id="rId2">
+                <a:hlinkClick r:id="rId3">
                   <a:extLst>
                     <a:ext uri="{A12FA001-AC4F-418D-AE19-62706E023703}">
                       <ahyp:hlinkClr xmlns:ahyp="http://schemas.microsoft.com/office/drawing/2018/hyperlinkcolor" val="tx"/>
@@ -8211,7 +8211,7 @@
                 </a:solidFill>
                 <a:latin typeface="Pragmatica" panose="020B0403040502020204" pitchFamily="34" charset="0"/>
               </a:rPr>
-              <a:t xml:space="preserve">  </a:t>
+              <a:t>  </a:t>
             </a:r>
           </a:p>
           <a:p>
@@ -8246,7 +8246,7 @@
                   <a:srgbClr val="CF3338"/>
                 </a:solidFill>
                 <a:latin typeface="Pragmatica" panose="020B0403040502020204" pitchFamily="34" charset="0"/>
-                <a:hlinkClick r:id="rId3">
+                <a:hlinkClick r:id="rId4">
                   <a:extLst>
                     <a:ext uri="{A12FA001-AC4F-418D-AE19-62706E023703}">
                       <ahyp:hlinkClr xmlns:ahyp="http://schemas.microsoft.com/office/drawing/2018/hyperlinkcolor" val="tx"/>
@@ -8301,7 +8301,7 @@
           <p:nvPr/>
         </p:nvPicPr>
         <p:blipFill>
-          <a:blip r:embed="rId4">
+          <a:blip r:embed="rId5">
             <a:extLst>
               <a:ext uri="{28A0092B-C50C-407E-A947-70E740481C1C}">
                 <a14:useLocalDpi xmlns:a14="http://schemas.microsoft.com/office/drawing/2010/main" val="0"/>
@@ -8337,7 +8337,7 @@
           <p:nvPr/>
         </p:nvPicPr>
         <p:blipFill>
-          <a:blip r:embed="rId5"/>
+          <a:blip r:embed="rId6"/>
           <a:stretch>
             <a:fillRect/>
           </a:stretch>
@@ -8483,49 +8483,14 @@
         </p:blipFill>
         <p:spPr>
           <a:xfrm>
-            <a:off x="5867400" y="419100"/>
-            <a:ext cx="10668000" cy="7107555"/>
+            <a:off x="6435838" y="419100"/>
+            <a:ext cx="9220200" cy="6142958"/>
           </a:xfrm>
           <a:prstGeom prst="rect">
             <a:avLst/>
           </a:prstGeom>
         </p:spPr>
       </p:pic>
-      <p:sp>
-        <p:nvSpPr>
-          <p:cNvPr id="10" name="TextBox 9">
-            <a:extLst>
-              <a:ext uri="{FF2B5EF4-FFF2-40B4-BE49-F238E27FC236}">
-                <a16:creationId xmlns:a16="http://schemas.microsoft.com/office/drawing/2014/main" id="{C0564D0D-700B-22A4-4B8A-8FDA84184A01}"/>
-              </a:ext>
-            </a:extLst>
-          </p:cNvPr>
-          <p:cNvSpPr txBox="1"/>
-          <p:nvPr/>
-        </p:nvSpPr>
-        <p:spPr>
-          <a:xfrm>
-            <a:off x="5867400" y="8058429"/>
-            <a:ext cx="10058400" cy="369332"/>
-          </a:xfrm>
-          <a:prstGeom prst="rect">
-            <a:avLst/>
-          </a:prstGeom>
-          <a:noFill/>
-        </p:spPr>
-        <p:txBody>
-          <a:bodyPr wrap="square" rtlCol="0">
-            <a:spAutoFit/>
-          </a:bodyPr>
-          <a:lstStyle/>
-          <a:p>
-            <a:r>
-              <a:rPr lang="en-US" dirty="0"/>
-              <a:t>S</a:t>
-            </a:r>
-          </a:p>
-        </p:txBody>
-      </p:sp>
       <p:sp>
         <p:nvSpPr>
           <p:cNvPr id="14" name="TextBox 13">
@@ -8540,7 +8505,7 @@
         </p:nvSpPr>
         <p:spPr>
           <a:xfrm>
-            <a:off x="6005546" y="7695781"/>
+            <a:off x="6487991" y="7003283"/>
             <a:ext cx="4419600" cy="1815882"/>
           </a:xfrm>
           <a:prstGeom prst="rect">
@@ -8605,7 +8570,7 @@
         </p:nvSpPr>
         <p:spPr>
           <a:xfrm>
-            <a:off x="11322827" y="7695781"/>
+            <a:off x="11201400" y="6979038"/>
             <a:ext cx="4602973" cy="2246769"/>
           </a:xfrm>
           <a:prstGeom prst="rect">
@@ -8866,7 +8831,7 @@
             <a:r>
               <a:rPr lang="en-US" sz="4400" b="1" u="sng" dirty="0">
                 <a:latin typeface="Pragmatica" panose="020B0403040502020204"/>
-                <a:hlinkClick r:id="rId8"/>
+                <a:hlinkClick r:id="rId3"/>
               </a:rPr>
               <a:t>The Modern Excel AI Stack</a:t>
             </a:r>
@@ -8921,7 +8886,7 @@
               <a:rPr lang="en-US" sz="4400" dirty="0">
                 <a:latin typeface="Pragmatica" panose="020B0403040502020204"/>
               </a:rPr>
-              <a:t xml:space="preserve"> courses</a:t>
+              <a:t> courses</a:t>
             </a:r>
           </a:p>
           <a:p>
@@ -8976,7 +8941,7 @@
             <a:r>
               <a:rPr lang="en-US" sz="4400" b="1" u="sng" dirty="0">
                 <a:latin typeface="Pragmatica" panose="020B0403040502020204"/>
-                <a:hlinkClick r:id="rId10"/>
+                <a:hlinkClick r:id="rId8"/>
               </a:rPr>
               <a:t>discovery call</a:t>
             </a:r>
@@ -9365,7 +9330,7 @@
               <a:rPr lang="en-US" sz="8000" dirty="0">
                 <a:latin typeface="Aliens &amp; cows" panose="00000500000000000000" pitchFamily="2" charset="0"/>
               </a:rPr>
-              <a:t>Next steps</a:t>
+              <a:t>Free download</a:t>
             </a:r>
           </a:p>
         </p:txBody>
@@ -9385,7 +9350,7 @@
         <p:spPr>
           <a:xfrm>
             <a:off x="520861" y="3191948"/>
-            <a:ext cx="14393120" cy="4708981"/>
+            <a:ext cx="14393120" cy="3785652"/>
           </a:xfrm>
           <a:prstGeom prst="rect">
             <a:avLst/>
@@ -9448,7 +9413,7 @@
                 </a:solidFill>
                 <a:latin typeface="Pragmatica" panose="020B0403040502020204" pitchFamily="34" charset="0"/>
               </a:rPr>
-              <a:t>But remember: the kit shows you what exists. The membership shows you what to do with it.</a:t>
+              <a:t>The kit shows you what exists. Ongoing resources show you what to do with them</a:t>
             </a:r>
           </a:p>
         </p:txBody>
@@ -9468,7 +9433,7 @@
           <p:nvPr/>
         </p:nvPicPr>
         <p:blipFill>
-          <a:blip r:embed="rId2">
+          <a:blip r:embed="rId3">
             <a:extLst>
               <a:ext uri="{28A0092B-C50C-407E-A947-70E740481C1C}">
                 <a14:useLocalDpi xmlns:a14="http://schemas.microsoft.com/office/drawing/2010/main" val="0"/>
@@ -9640,7 +9605,7 @@
                 </a:solidFill>
                 <a:latin typeface="Pragmatica" panose="020B0403040502020204" pitchFamily="34" charset="0"/>
               </a:rPr>
-              <a:t xml:space="preserve">For teams/organizations: Book a discovery call at </a:t>
+              <a:t>For teams/organizations: Book a discovery call at </a:t>
             </a:r>
             <a:r>
               <a:rPr lang="en-US" sz="6000" dirty="0">
@@ -9648,7 +9613,7 @@
                   <a:srgbClr val="CF3338"/>
                 </a:solidFill>
                 <a:latin typeface="Pragmatica" panose="020B0403040502020204" pitchFamily="34" charset="0"/>
-                <a:hlinkClick r:id="rId2">
+                <a:hlinkClick r:id="rId3">
                   <a:extLst>
                     <a:ext uri="{A12FA001-AC4F-418D-AE19-62706E023703}">
                       <ahyp:hlinkClr xmlns:ahyp="http://schemas.microsoft.com/office/drawing/2018/hyperlinkcolor" val="tx"/>
@@ -9665,7 +9630,7 @@
                 </a:solidFill>
                 <a:latin typeface="Pragmatica" panose="020B0403040502020204" pitchFamily="34" charset="0"/>
               </a:rPr>
-              <a:t xml:space="preserve"> </a:t>
+              <a:t> </a:t>
             </a:r>
           </a:p>
         </p:txBody>
@@ -9685,7 +9650,7 @@
           <p:nvPr/>
         </p:nvPicPr>
         <p:blipFill>
-          <a:blip r:embed="rId3">
+          <a:blip r:embed="rId4">
             <a:extLst>
               <a:ext uri="{28A0092B-C50C-407E-A947-70E740481C1C}">
                 <a14:useLocalDpi xmlns:a14="http://schemas.microsoft.com/office/drawing/2010/main" val="0"/>
@@ -10671,7 +10636,7 @@
                 </a:solidFill>
                 <a:latin typeface="Pragmatica" panose="020B0403040502020204" pitchFamily="34" charset="0"/>
               </a:rPr>
-              <a:t xml:space="preserve">Download at </a:t>
+              <a:t>Download at </a:t>
             </a:r>
             <a:r>
               <a:rPr lang="en-US" sz="9600" dirty="0">
@@ -10696,7 +10661,7 @@
                 </a:solidFill>
                 <a:latin typeface="Pragmatica" panose="020B0403040502020204" pitchFamily="34" charset="0"/>
               </a:rPr>
-              <a:t xml:space="preserve"> </a:t>
+              <a:t> </a:t>
             </a:r>
           </a:p>
         </p:txBody>
@@ -11680,7 +11645,7 @@
           <p:nvPr/>
         </p:nvPicPr>
         <p:blipFill>
-          <a:blip r:embed="rId2">
+          <a:blip r:embed="rId3">
             <a:extLst>
               <a:ext uri="{28A0092B-C50C-407E-A947-70E740481C1C}">
                 <a14:useLocalDpi xmlns:a14="http://schemas.microsoft.com/office/drawing/2010/main" val="0"/>

--- a/modern-excel-demo-day.pptx
+++ b/modern-excel-demo-day.pptx
@@ -5,7 +5,7 @@
     <p:sldMasterId id="2147483648" r:id="rId1"/>
   </p:sldMasterIdLst>
   <p:notesMasterIdLst>
-    <p:notesMasterId r:id="rId19"/>
+    <p:notesMasterId r:id="rId20"/>
   </p:notesMasterIdLst>
   <p:sldIdLst>
     <p:sldId id="256" r:id="rId2"/>
@@ -23,8 +23,9 @@
     <p:sldId id="455" r:id="rId14"/>
     <p:sldId id="456" r:id="rId15"/>
     <p:sldId id="452" r:id="rId16"/>
-    <p:sldId id="453" r:id="rId17"/>
-    <p:sldId id="415" r:id="rId18"/>
+    <p:sldId id="458" r:id="rId17"/>
+    <p:sldId id="453" r:id="rId18"/>
+    <p:sldId id="415" r:id="rId19"/>
   </p:sldIdLst>
   <p:sldSz cx="18288000" cy="10287000"/>
   <p:notesSz cx="6858000" cy="9144000"/>
@@ -4131,6 +4132,117 @@
   <p:cSld>
     <p:spTree>
       <p:nvGrpSpPr>
+        <p:cNvPr id="1" name="">
+          <a:extLst>
+            <a:ext uri="{FF2B5EF4-FFF2-40B4-BE49-F238E27FC236}">
+              <a16:creationId xmlns:a16="http://schemas.microsoft.com/office/drawing/2014/main" id="{F26AE75F-B61E-B762-3237-30963FAF787C}"/>
+            </a:ext>
+          </a:extLst>
+        </p:cNvPr>
+        <p:cNvGrpSpPr/>
+        <p:nvPr/>
+      </p:nvGrpSpPr>
+      <p:grpSpPr>
+        <a:xfrm>
+          <a:off x="0" y="0"/>
+          <a:ext cx="0" cy="0"/>
+          <a:chOff x="0" y="0"/>
+          <a:chExt cx="0" cy="0"/>
+        </a:xfrm>
+      </p:grpSpPr>
+      <p:sp>
+        <p:nvSpPr>
+          <p:cNvPr id="2" name="Slide Image Placeholder 1">
+            <a:extLst>
+              <a:ext uri="{FF2B5EF4-FFF2-40B4-BE49-F238E27FC236}">
+                <a16:creationId xmlns:a16="http://schemas.microsoft.com/office/drawing/2014/main" id="{4E80F720-8246-873D-E789-090B1E24C403}"/>
+              </a:ext>
+            </a:extLst>
+          </p:cNvPr>
+          <p:cNvSpPr>
+            <a:spLocks noGrp="1" noRot="1" noChangeAspect="1"/>
+          </p:cNvSpPr>
+          <p:nvPr>
+            <p:ph type="sldImg"/>
+          </p:nvPr>
+        </p:nvSpPr>
+        <p:spPr/>
+      </p:sp>
+      <p:sp>
+        <p:nvSpPr>
+          <p:cNvPr id="3" name="Notes Placeholder 2">
+            <a:extLst>
+              <a:ext uri="{FF2B5EF4-FFF2-40B4-BE49-F238E27FC236}">
+                <a16:creationId xmlns:a16="http://schemas.microsoft.com/office/drawing/2014/main" id="{D7FD71D8-9539-651D-2703-09C35FE880F6}"/>
+              </a:ext>
+            </a:extLst>
+          </p:cNvPr>
+          <p:cNvSpPr>
+            <a:spLocks noGrp="1"/>
+          </p:cNvSpPr>
+          <p:nvPr>
+            <p:ph type="body" idx="1"/>
+          </p:nvPr>
+        </p:nvSpPr>
+        <p:spPr/>
+        <p:txBody>
+          <a:bodyPr/>
+          <a:lstStyle/>
+          <a:p>
+            <a:r>
+              <a:rPr lang="en-US" dirty="0"/>
+              <a:t>If you know someone who’s still manually cleaning data every Monday morning or rebuilding the same report from scratch every month, send them this recording. That’s the person this is for.</a:t>
+            </a:r>
+          </a:p>
+        </p:txBody>
+      </p:sp>
+      <p:sp>
+        <p:nvSpPr>
+          <p:cNvPr id="4" name="Slide Number Placeholder 3">
+            <a:extLst>
+              <a:ext uri="{FF2B5EF4-FFF2-40B4-BE49-F238E27FC236}">
+                <a16:creationId xmlns:a16="http://schemas.microsoft.com/office/drawing/2014/main" id="{03100CE4-C900-2E39-0DE1-FC931D76CAA1}"/>
+              </a:ext>
+            </a:extLst>
+          </p:cNvPr>
+          <p:cNvSpPr>
+            <a:spLocks noGrp="1"/>
+          </p:cNvSpPr>
+          <p:nvPr>
+            <p:ph type="sldNum" sz="quarter" idx="5"/>
+          </p:nvPr>
+        </p:nvSpPr>
+        <p:spPr/>
+        <p:txBody>
+          <a:bodyPr/>
+          <a:lstStyle/>
+          <a:p>
+            <a:fld id="{1300335D-9F13-4B80-ADC5-B0EA3E10FF6B}" type="slidenum">
+              <a:rPr lang="en-US" smtClean="0"/>
+              <a:t>16</a:t>
+            </a:fld>
+            <a:endParaRPr lang="en-US"/>
+          </a:p>
+        </p:txBody>
+      </p:sp>
+    </p:spTree>
+    <p:extLst>
+      <p:ext uri="{BB962C8B-B14F-4D97-AF65-F5344CB8AC3E}">
+        <p14:creationId xmlns:p14="http://schemas.microsoft.com/office/powerpoint/2010/main" val="3268075693"/>
+      </p:ext>
+    </p:extLst>
+  </p:cSld>
+  <p:clrMapOvr>
+    <a:masterClrMapping/>
+  </p:clrMapOvr>
+</p:notes>
+</file>
+
+<file path=ppt/notesSlides/notesSlide14.xml><?xml version="1.0" encoding="utf-8"?>
+<p:notes xmlns:a="http://schemas.openxmlformats.org/drawingml/2006/main" xmlns:r="http://schemas.openxmlformats.org/officeDocument/2006/relationships" xmlns:p="http://schemas.openxmlformats.org/presentationml/2006/main">
+  <p:cSld>
+    <p:spTree>
+      <p:nvGrpSpPr>
         <p:cNvPr id="1" name=""/>
         <p:cNvGrpSpPr/>
         <p:nvPr/>
@@ -4194,7 +4306,7 @@
           <a:p>
             <a:fld id="{1300335D-9F13-4B80-ADC5-B0EA3E10FF6B}" type="slidenum">
               <a:rPr lang="en-US" smtClean="0"/>
-              <a:t>16</a:t>
+              <a:t>17</a:t>
             </a:fld>
             <a:endParaRPr lang="en-US"/>
           </a:p>
@@ -8785,7 +8897,7 @@
               <a:rPr lang="en-US" sz="9000" dirty="0">
                 <a:latin typeface="Aliens &amp; cows" panose="00000500000000000000" pitchFamily="2" charset="0"/>
               </a:rPr>
-              <a:t>One next step</a:t>
+              <a:t>Where to go next</a:t>
             </a:r>
           </a:p>
         </p:txBody>
@@ -9468,7 +9580,7 @@
 </file>
 
 <file path=ppt/slides/slide15.xml><?xml version="1.0" encoding="utf-8"?>
-<p:sld xmlns:a="http://schemas.openxmlformats.org/drawingml/2006/main" xmlns:r="http://schemas.openxmlformats.org/officeDocument/2006/relationships" xmlns:p="http://schemas.openxmlformats.org/presentationml/2006/main">
+<p:sld xmlns:a="http://schemas.openxmlformats.org/drawingml/2006/main" xmlns:r="http://schemas.openxmlformats.org/officeDocument/2006/relationships" xmlns:p="http://schemas.openxmlformats.org/presentationml/2006/main" show="0">
   <p:cSld>
     <p:spTree>
       <p:nvGrpSpPr>
@@ -9692,6 +9804,266 @@
         <p:cNvPr id="1" name="">
           <a:extLst>
             <a:ext uri="{FF2B5EF4-FFF2-40B4-BE49-F238E27FC236}">
+              <a16:creationId xmlns:a16="http://schemas.microsoft.com/office/drawing/2014/main" id="{DAA6063F-EB7F-3903-0A44-388EB0356993}"/>
+            </a:ext>
+          </a:extLst>
+        </p:cNvPr>
+        <p:cNvGrpSpPr/>
+        <p:nvPr/>
+      </p:nvGrpSpPr>
+      <p:grpSpPr>
+        <a:xfrm>
+          <a:off x="0" y="0"/>
+          <a:ext cx="0" cy="0"/>
+          <a:chOff x="0" y="0"/>
+          <a:chExt cx="0" cy="0"/>
+        </a:xfrm>
+      </p:grpSpPr>
+      <p:sp>
+        <p:nvSpPr>
+          <p:cNvPr id="11" name="TextBox 10">
+            <a:extLst>
+              <a:ext uri="{FF2B5EF4-FFF2-40B4-BE49-F238E27FC236}">
+                <a16:creationId xmlns:a16="http://schemas.microsoft.com/office/drawing/2014/main" id="{D7C92F18-3791-E242-1F18-2F32927AF8A5}"/>
+              </a:ext>
+            </a:extLst>
+          </p:cNvPr>
+          <p:cNvSpPr txBox="1"/>
+          <p:nvPr/>
+        </p:nvSpPr>
+        <p:spPr>
+          <a:xfrm>
+            <a:off x="520861" y="170082"/>
+            <a:ext cx="14947739" cy="1323439"/>
+          </a:xfrm>
+          <a:prstGeom prst="rect">
+            <a:avLst/>
+          </a:prstGeom>
+          <a:noFill/>
+        </p:spPr>
+        <p:txBody>
+          <a:bodyPr wrap="square" rtlCol="0">
+            <a:spAutoFit/>
+          </a:bodyPr>
+          <a:lstStyle/>
+          <a:p>
+            <a:r>
+              <a:rPr lang="en-US" sz="8000" dirty="0">
+                <a:latin typeface="Aliens &amp; cows" panose="00000500000000000000" pitchFamily="2" charset="0"/>
+              </a:rPr>
+              <a:t>Next steps</a:t>
+            </a:r>
+          </a:p>
+        </p:txBody>
+      </p:sp>
+      <p:sp>
+        <p:nvSpPr>
+          <p:cNvPr id="3" name="TextBox 2">
+            <a:extLst>
+              <a:ext uri="{FF2B5EF4-FFF2-40B4-BE49-F238E27FC236}">
+                <a16:creationId xmlns:a16="http://schemas.microsoft.com/office/drawing/2014/main" id="{1DC59D5C-7CAA-A530-AE71-5F1369B4C77E}"/>
+              </a:ext>
+            </a:extLst>
+          </p:cNvPr>
+          <p:cNvSpPr txBox="1"/>
+          <p:nvPr/>
+        </p:nvSpPr>
+        <p:spPr>
+          <a:xfrm>
+            <a:off x="520861" y="3191948"/>
+            <a:ext cx="8623139" cy="5632311"/>
+          </a:xfrm>
+          <a:prstGeom prst="rect">
+            <a:avLst/>
+          </a:prstGeom>
+          <a:noFill/>
+        </p:spPr>
+        <p:txBody>
+          <a:bodyPr wrap="square" rtlCol="0">
+            <a:spAutoFit/>
+          </a:bodyPr>
+          <a:lstStyle/>
+          <a:p>
+            <a:pPr marL="685800" indent="-685800">
+              <a:buClr>
+                <a:srgbClr val="CF3338"/>
+              </a:buClr>
+              <a:buFont typeface="Arial" panose="020B0604020202020204" pitchFamily="34" charset="0"/>
+              <a:buChar char="•"/>
+            </a:pPr>
+            <a:r>
+              <a:rPr lang="en-US" sz="6000" dirty="0">
+                <a:solidFill>
+                  <a:srgbClr val="707070"/>
+                </a:solidFill>
+                <a:latin typeface="Pragmatica" panose="020B0403040502020204" pitchFamily="34" charset="0"/>
+              </a:rPr>
+              <a:t>Download files stay up at </a:t>
+            </a:r>
+            <a:r>
+              <a:rPr lang="en-US" sz="6000" dirty="0">
+                <a:solidFill>
+                  <a:srgbClr val="CF3338"/>
+                </a:solidFill>
+                <a:latin typeface="Pragmatica" panose="020B0403040502020204" pitchFamily="34" charset="0"/>
+                <a:hlinkClick r:id="rId3">
+                  <a:extLst>
+                    <a:ext uri="{A12FA001-AC4F-418D-AE19-62706E023703}">
+                      <ahyp:hlinkClr xmlns:ahyp="http://schemas.microsoft.com/office/drawing/2018/hyperlinkcolor" val="tx"/>
+                    </a:ext>
+                  </a:extLst>
+                </a:hlinkClick>
+              </a:rPr>
+              <a:t>https://swiy.co/mxldd</a:t>
+            </a:r>
+            <a:r>
+              <a:rPr lang="en-US" sz="6000" dirty="0">
+                <a:solidFill>
+                  <a:srgbClr val="707070"/>
+                </a:solidFill>
+                <a:latin typeface="Pragmatica" panose="020B0403040502020204" pitchFamily="34" charset="0"/>
+              </a:rPr>
+              <a:t> </a:t>
+            </a:r>
+          </a:p>
+          <a:p>
+            <a:pPr marL="685800" indent="-685800">
+              <a:buClr>
+                <a:srgbClr val="CF3338"/>
+              </a:buClr>
+              <a:buFont typeface="Arial" panose="020B0604020202020204" pitchFamily="34" charset="0"/>
+              <a:buChar char="•"/>
+            </a:pPr>
+            <a:r>
+              <a:rPr lang="en-US" sz="6000" dirty="0">
+                <a:solidFill>
+                  <a:srgbClr val="707070"/>
+                </a:solidFill>
+                <a:latin typeface="Pragmatica" panose="020B0403040502020204" pitchFamily="34" charset="0"/>
+              </a:rPr>
+              <a:t>Recording is at </a:t>
+            </a:r>
+            <a:r>
+              <a:rPr lang="en-US" sz="6000" dirty="0">
+                <a:solidFill>
+                  <a:srgbClr val="C00000"/>
+                </a:solidFill>
+                <a:latin typeface="Pragmatica" panose="020B0403040502020204" pitchFamily="34" charset="0"/>
+                <a:hlinkClick r:id="rId4">
+                  <a:extLst>
+                    <a:ext uri="{A12FA001-AC4F-418D-AE19-62706E023703}">
+                      <ahyp:hlinkClr xmlns:ahyp="http://schemas.microsoft.com/office/drawing/2018/hyperlinkcolor" val="tx"/>
+                    </a:ext>
+                  </a:extLst>
+                </a:hlinkClick>
+              </a:rPr>
+              <a:t>https://stringfestdata.gumroad.com/l/mxlais</a:t>
+            </a:r>
+            <a:r>
+              <a:rPr lang="en-US" sz="6000" dirty="0">
+                <a:solidFill>
+                  <a:srgbClr val="707070"/>
+                </a:solidFill>
+                <a:latin typeface="Pragmatica" panose="020B0403040502020204" pitchFamily="34" charset="0"/>
+              </a:rPr>
+              <a:t>, join first week free</a:t>
+            </a:r>
+            <a:endParaRPr lang="en-US" sz="6000" dirty="0">
+              <a:solidFill>
+                <a:srgbClr val="CF3338"/>
+              </a:solidFill>
+              <a:latin typeface="Pragmatica" panose="020B0403040502020204" pitchFamily="34" charset="0"/>
+            </a:endParaRPr>
+          </a:p>
+        </p:txBody>
+      </p:sp>
+      <p:pic>
+        <p:nvPicPr>
+          <p:cNvPr id="15" name="Picture 14" descr="A close up of a sign  Description automatically generated">
+            <a:extLst>
+              <a:ext uri="{FF2B5EF4-FFF2-40B4-BE49-F238E27FC236}">
+                <a16:creationId xmlns:a16="http://schemas.microsoft.com/office/drawing/2014/main" id="{987129F2-D981-3648-16B7-2CDB49195A93}"/>
+              </a:ext>
+            </a:extLst>
+          </p:cNvPr>
+          <p:cNvPicPr>
+            <a:picLocks noChangeAspect="1"/>
+          </p:cNvPicPr>
+          <p:nvPr/>
+        </p:nvPicPr>
+        <p:blipFill>
+          <a:blip r:embed="rId5">
+            <a:extLst>
+              <a:ext uri="{28A0092B-C50C-407E-A947-70E740481C1C}">
+                <a14:useLocalDpi xmlns:a14="http://schemas.microsoft.com/office/drawing/2010/main" val="0"/>
+              </a:ext>
+            </a:extLst>
+          </a:blip>
+          <a:stretch>
+            <a:fillRect/>
+          </a:stretch>
+        </p:blipFill>
+        <p:spPr>
+          <a:xfrm>
+            <a:off x="16341036" y="8058429"/>
+            <a:ext cx="1942857" cy="2228571"/>
+          </a:xfrm>
+          <a:prstGeom prst="rect">
+            <a:avLst/>
+          </a:prstGeom>
+        </p:spPr>
+      </p:pic>
+      <p:pic>
+        <p:nvPicPr>
+          <p:cNvPr id="2" name="Picture 1" descr="The Modern Excel AI Stack&#10;&#10;AI-generated content may be incorrect.">
+            <a:extLst>
+              <a:ext uri="{FF2B5EF4-FFF2-40B4-BE49-F238E27FC236}">
+                <a16:creationId xmlns:a16="http://schemas.microsoft.com/office/drawing/2014/main" id="{1CBDBA0F-F3F9-08AE-4D2A-E815C316513F}"/>
+              </a:ext>
+            </a:extLst>
+          </p:cNvPr>
+          <p:cNvPicPr>
+            <a:picLocks noChangeAspect="1"/>
+          </p:cNvPicPr>
+          <p:nvPr/>
+        </p:nvPicPr>
+        <p:blipFill>
+          <a:blip r:embed="rId6"/>
+          <a:stretch>
+            <a:fillRect/>
+          </a:stretch>
+        </p:blipFill>
+        <p:spPr>
+          <a:xfrm>
+            <a:off x="10287000" y="5128992"/>
+            <a:ext cx="7989966" cy="5331856"/>
+          </a:xfrm>
+          <a:prstGeom prst="rect">
+            <a:avLst/>
+          </a:prstGeom>
+        </p:spPr>
+      </p:pic>
+    </p:spTree>
+    <p:extLst>
+      <p:ext uri="{BB962C8B-B14F-4D97-AF65-F5344CB8AC3E}">
+        <p14:creationId xmlns:p14="http://schemas.microsoft.com/office/powerpoint/2010/main" val="1448038103"/>
+      </p:ext>
+    </p:extLst>
+  </p:cSld>
+  <p:clrMapOvr>
+    <a:masterClrMapping/>
+  </p:clrMapOvr>
+</p:sld>
+</file>
+
+<file path=ppt/slides/slide17.xml><?xml version="1.0" encoding="utf-8"?>
+<p:sld xmlns:a="http://schemas.openxmlformats.org/drawingml/2006/main" xmlns:r="http://schemas.openxmlformats.org/officeDocument/2006/relationships" xmlns:p="http://schemas.openxmlformats.org/presentationml/2006/main">
+  <p:cSld>
+    <p:spTree>
+      <p:nvGrpSpPr>
+        <p:cNvPr id="1" name="">
+          <a:extLst>
+            <a:ext uri="{FF2B5EF4-FFF2-40B4-BE49-F238E27FC236}">
               <a16:creationId xmlns:a16="http://schemas.microsoft.com/office/drawing/2014/main" id="{8FC0C042-4FA7-C99A-DB6A-E56C8A4C9FF2}"/>
             </a:ext>
           </a:extLst>
@@ -9812,7 +10184,7 @@
 </p:sld>
 </file>
 
-<file path=ppt/slides/slide17.xml><?xml version="1.0" encoding="utf-8"?>
+<file path=ppt/slides/slide18.xml><?xml version="1.0" encoding="utf-8"?>
 <p:sld xmlns:a="http://schemas.openxmlformats.org/drawingml/2006/main" xmlns:r="http://schemas.openxmlformats.org/officeDocument/2006/relationships" xmlns:p="http://schemas.openxmlformats.org/presentationml/2006/main">
   <p:cSld>
     <p:spTree>
